--- a/AI-Bowling-Master.pptx
+++ b/AI-Bowling-Master.pptx
@@ -5,7 +5,7 @@
     <p:sldMasterId id="2147483648" r:id="rId1"/>
   </p:sldMasterIdLst>
   <p:notesMasterIdLst>
-    <p:notesMasterId r:id="rId12"/>
+    <p:notesMasterId r:id="rId11"/>
   </p:notesMasterIdLst>
   <p:sldIdLst>
     <p:sldId id="256" r:id="rId2"/>
@@ -16,19 +16,25 @@
     <p:sldId id="261" r:id="rId7"/>
     <p:sldId id="262" r:id="rId8"/>
     <p:sldId id="263" r:id="rId9"/>
-    <p:sldId id="264" r:id="rId10"/>
-    <p:sldId id="265" r:id="rId11"/>
+    <p:sldId id="265" r:id="rId10"/>
   </p:sldIdLst>
   <p:sldSz cx="12192000" cy="6858000"/>
   <p:notesSz cx="6858000" cy="12192000"/>
   <p:embeddedFontLst>
     <p:embeddedFont>
-      <p:font typeface="DM Sans" panose="020F0502020204030204" pitchFamily="2" charset="0"/>
-      <p:regular r:id="rId13"/>
+      <p:font typeface="Meiryo UI" panose="020B0604030504040204" pitchFamily="50" charset="-128"/>
+      <p:regular r:id="rId12"/>
+      <p:bold r:id="rId13"/>
+      <p:italic r:id="rId14"/>
+      <p:boldItalic r:id="rId15"/>
     </p:embeddedFont>
     <p:embeddedFont>
-      <p:font typeface="PT Serif" panose="020F0502020204030204" pitchFamily="18" charset="0"/>
-      <p:regular r:id="rId14"/>
+      <p:font typeface="DM Sans" pitchFamily="2" charset="0"/>
+      <p:regular r:id="rId16"/>
+    </p:embeddedFont>
+    <p:embeddedFont>
+      <p:font typeface="PT Serif" panose="020A0603040505020204" pitchFamily="18" charset="0"/>
+      <p:regular r:id="rId17"/>
     </p:embeddedFont>
   </p:embeddedFontLst>
   <p:defaultTextStyle>
@@ -322,90 +328,6 @@
             <a:fld id="{F7021451-1387-4CA6-816F-3879F97B5CBC}" type="slidenum">
               <a:rPr lang="en-US"/>
               <a:t>1</a:t>
-            </a:fld>
-            <a:endParaRPr lang="en-US"/>
-          </a:p>
-        </p:txBody>
-      </p:sp>
-    </p:spTree>
-    <p:extLst>
-      <p:ext uri="{BB962C8B-B14F-4D97-AF65-F5344CB8AC3E}">
-        <p14:creationId xmlns:p14="http://schemas.microsoft.com/office/powerpoint/2010/main" val="1024086991"/>
-      </p:ext>
-    </p:extLst>
-  </p:cSld>
-  <p:clrMapOvr>
-    <a:masterClrMapping/>
-  </p:clrMapOvr>
-</p:notes>
-</file>
-
-<file path=ppt/notesSlides/notesSlide10.xml><?xml version="1.0" encoding="utf-8"?>
-<p:notes xmlns:a="http://schemas.openxmlformats.org/drawingml/2006/main" xmlns:r="http://schemas.openxmlformats.org/officeDocument/2006/relationships" xmlns:p="http://schemas.openxmlformats.org/presentationml/2006/main">
-  <p:cSld>
-    <p:spTree>
-      <p:nvGrpSpPr>
-        <p:cNvPr id="1" name=""/>
-        <p:cNvGrpSpPr/>
-        <p:nvPr/>
-      </p:nvGrpSpPr>
-      <p:grpSpPr>
-        <a:xfrm>
-          <a:off x="0" y="0"/>
-          <a:ext cx="0" cy="0"/>
-          <a:chOff x="0" y="0"/>
-          <a:chExt cx="0" cy="0"/>
-        </a:xfrm>
-      </p:grpSpPr>
-      <p:sp>
-        <p:nvSpPr>
-          <p:cNvPr id="2" name="Slide Image Placeholder 1"/>
-          <p:cNvSpPr>
-            <a:spLocks noGrp="1" noRot="1" noChangeAspect="1"/>
-          </p:cNvSpPr>
-          <p:nvPr>
-            <p:ph type="sldImg"/>
-          </p:nvPr>
-        </p:nvSpPr>
-        <p:spPr/>
-      </p:sp>
-      <p:sp>
-        <p:nvSpPr>
-          <p:cNvPr id="3" name="Notes Placeholder 2"/>
-          <p:cNvSpPr>
-            <a:spLocks noGrp="1"/>
-          </p:cNvSpPr>
-          <p:nvPr>
-            <p:ph type="body" idx="1"/>
-          </p:nvPr>
-        </p:nvSpPr>
-        <p:spPr/>
-        <p:txBody>
-          <a:bodyPr/>
-          <a:lstStyle/>
-          <a:p>
-            <a:endParaRPr lang="en-US" dirty="0"/>
-          </a:p>
-        </p:txBody>
-      </p:sp>
-      <p:sp>
-        <p:nvSpPr>
-          <p:cNvPr id="4" name="Slide Number Placeholder 3"/>
-          <p:cNvSpPr>
-            <a:spLocks noGrp="1"/>
-          </p:cNvSpPr>
-          <p:nvPr>
-            <p:ph type="sldNum" sz="quarter" idx="10"/>
-          </p:nvPr>
-        </p:nvSpPr>
-        <p:spPr/>
-        <p:txBody>
-          <a:bodyPr/>
-          <a:lstStyle/>
-          <a:p>
-            <a:fld id="{F7021451-1387-4CA6-816F-3879F97B5CBC}" type="slidenum">
-              <a:rPr lang="en-US"/>
-              <a:t>10</a:t>
             </a:fld>
             <a:endParaRPr lang="en-US"/>
           </a:p>
@@ -1595,13 +1517,16 @@
                 <a:solidFill>
                   <a:srgbClr val="020202"/>
                 </a:solidFill>
-                <a:latin typeface="PT Serif" pitchFamily="34" charset="0"/>
-                <a:ea typeface="PT Serif" pitchFamily="34" charset="-122"/>
+                <a:latin typeface="Meiryo UI" panose="020B0604030504040204" pitchFamily="50" charset="-128"/>
+                <a:ea typeface="Meiryo UI" panose="020B0604030504040204" pitchFamily="50" charset="-128"/>
                 <a:cs typeface="PT Serif" pitchFamily="34" charset="-120"/>
               </a:rPr>
               <a:t>AI Bowling Master</a:t>
             </a:r>
-            <a:endParaRPr lang="en-US" sz="3900" dirty="0"/>
+            <a:endParaRPr lang="en-US" sz="3900" dirty="0">
+              <a:latin typeface="Meiryo UI" panose="020B0604030504040204" pitchFamily="50" charset="-128"/>
+              <a:ea typeface="Meiryo UI" panose="020B0604030504040204" pitchFamily="50" charset="-128"/>
+            </a:endParaRPr>
           </a:p>
         </p:txBody>
       </p:sp>
@@ -1637,13 +1562,16 @@
                 <a:solidFill>
                   <a:srgbClr val="383838"/>
                 </a:solidFill>
-                <a:latin typeface="DM Sans" pitchFamily="34" charset="0"/>
-                <a:ea typeface="DM Sans" pitchFamily="34" charset="-122"/>
+                <a:latin typeface="Meiryo UI" panose="020B0604030504040204" pitchFamily="50" charset="-128"/>
+                <a:ea typeface="Meiryo UI" panose="020B0604030504040204" pitchFamily="50" charset="-128"/>
                 <a:cs typeface="DM Sans" pitchFamily="34" charset="-120"/>
               </a:rPr>
               <a:t>ボウリング場とプレイヤーのための、AIコーチ＆スコア分析アプリ</a:t>
             </a:r>
-            <a:endParaRPr lang="ja-JP" sz="1450" dirty="0"/>
+            <a:endParaRPr lang="ja-JP" sz="1450" dirty="0">
+              <a:latin typeface="Meiryo UI" panose="020B0604030504040204" pitchFamily="50" charset="-128"/>
+              <a:ea typeface="Meiryo UI" panose="020B0604030504040204" pitchFamily="50" charset="-128"/>
+            </a:endParaRPr>
           </a:p>
         </p:txBody>
       </p:sp>
@@ -1674,773 +1602,6 @@
               </a:lnSpc>
               <a:buNone/>
             </a:pPr>
-            <a:endParaRPr lang="ja-JP" sz="1150" dirty="0"/>
-          </a:p>
-        </p:txBody>
-      </p:sp>
-    </p:spTree>
-  </p:cSld>
-  <p:clrMapOvr>
-    <a:masterClrMapping/>
-  </p:clrMapOvr>
-</p:sld>
-</file>
-
-<file path=ppt/slides/slide10.xml><?xml version="1.0" encoding="utf-8"?>
-<p:sld xmlns:a="http://schemas.openxmlformats.org/drawingml/2006/main" xmlns:r="http://schemas.openxmlformats.org/officeDocument/2006/relationships" xmlns:p="http://schemas.openxmlformats.org/presentationml/2006/main">
-  <p:cSld name="Slide 10">
-    <p:spTree>
-      <p:nvGrpSpPr>
-        <p:cNvPr id="1" name=""/>
-        <p:cNvGrpSpPr/>
-        <p:nvPr/>
-      </p:nvGrpSpPr>
-      <p:grpSpPr>
-        <a:xfrm>
-          <a:off x="0" y="0"/>
-          <a:ext cx="0" cy="0"/>
-          <a:chOff x="0" y="0"/>
-          <a:chExt cx="0" cy="0"/>
-        </a:xfrm>
-      </p:grpSpPr>
-      <p:pic>
-        <p:nvPicPr>
-          <p:cNvPr id="2" name="Image 0" descr="preencoded.png"/>
-          <p:cNvPicPr>
-            <a:picLocks noChangeAspect="1"/>
-          </p:cNvPicPr>
-          <p:nvPr/>
-        </p:nvPicPr>
-        <p:blipFill>
-          <a:blip r:embed="rId3"/>
-          <a:stretch>
-            <a:fillRect/>
-          </a:stretch>
-        </p:blipFill>
-        <p:spPr>
-          <a:xfrm>
-            <a:off x="7619809" y="0"/>
-            <a:ext cx="4571886" cy="6858000"/>
-          </a:xfrm>
-          <a:prstGeom prst="rect">
-            <a:avLst/>
-          </a:prstGeom>
-        </p:spPr>
-      </p:pic>
-      <p:sp>
-        <p:nvSpPr>
-          <p:cNvPr id="3" name="Text 0"/>
-          <p:cNvSpPr/>
-          <p:nvPr/>
-        </p:nvSpPr>
-        <p:spPr>
-          <a:xfrm>
-            <a:off x="661475" y="725289"/>
-            <a:ext cx="4578930" cy="496193"/>
-          </a:xfrm>
-          <a:prstGeom prst="rect">
-            <a:avLst/>
-          </a:prstGeom>
-          <a:noFill/>
-          <a:ln/>
-        </p:spPr>
-        <p:txBody>
-          <a:bodyPr wrap="none" lIns="0" tIns="0" rIns="0" bIns="0" rtlCol="0" anchor="t"/>
-          <a:lstStyle/>
-          <a:p>
-            <a:pPr marL="0" indent="0" algn="l">
-              <a:lnSpc>
-                <a:spcPct val="104000"/>
-              </a:lnSpc>
-              <a:buNone/>
-            </a:pPr>
-            <a:r>
-              <a:rPr lang="ja-JP" altLang="en-US" sz="3100" dirty="0">
-                <a:solidFill>
-                  <a:srgbClr val="020202"/>
-                </a:solidFill>
-                <a:latin typeface="PT Serif" pitchFamily="34" charset="0"/>
-                <a:ea typeface="PT Serif" pitchFamily="34" charset="-122"/>
-                <a:cs typeface="PT Serif" pitchFamily="34" charset="-120"/>
-              </a:rPr>
-              <a:t>次のステップへ</a:t>
-            </a:r>
-            <a:endParaRPr lang="ja-JP" sz="3100" dirty="0"/>
-          </a:p>
-        </p:txBody>
-      </p:sp>
-      <p:sp>
-        <p:nvSpPr>
-          <p:cNvPr id="4" name="Text 1"/>
-          <p:cNvSpPr/>
-          <p:nvPr/>
-        </p:nvSpPr>
-        <p:spPr>
-          <a:xfrm>
-            <a:off x="661475" y="1402854"/>
-            <a:ext cx="6906444" cy="217686"/>
-          </a:xfrm>
-          <a:prstGeom prst="rect">
-            <a:avLst/>
-          </a:prstGeom>
-          <a:noFill/>
-          <a:ln/>
-        </p:spPr>
-        <p:txBody>
-          <a:bodyPr wrap="none" lIns="0" tIns="0" rIns="0" bIns="0" rtlCol="0" anchor="t"/>
-          <a:lstStyle/>
-          <a:p>
-            <a:pPr marL="0" indent="0" algn="l">
-              <a:lnSpc>
-                <a:spcPct val="120000"/>
-              </a:lnSpc>
-              <a:buNone/>
-            </a:pPr>
-            <a:r>
-              <a:rPr lang="ja-JP" altLang="en-US" sz="1150" dirty="0">
-                <a:solidFill>
-                  <a:srgbClr val="383838"/>
-                </a:solidFill>
-                <a:latin typeface="DM Sans" pitchFamily="34" charset="0"/>
-                <a:ea typeface="DM Sans" pitchFamily="34" charset="-122"/>
-                <a:cs typeface="DM Sans" pitchFamily="34" charset="-120"/>
-              </a:rPr>
-              <a:t>AI Bowling Master で、ボウリング場とプレイヤーの双方に</a:t>
-            </a:r>
-            <a:r>
-              <a:rPr lang="ja-JP" altLang="en-US" sz="1150" dirty="0">
-                <a:solidFill>
-                  <a:srgbClr val="E04F00"/>
-                </a:solidFill>
-                <a:latin typeface="DM Sans" pitchFamily="34" charset="0"/>
-                <a:ea typeface="DM Sans" pitchFamily="34" charset="-122"/>
-                <a:cs typeface="DM Sans" pitchFamily="34" charset="-120"/>
-              </a:rPr>
-              <a:t>データドリブンな上達体験</a:t>
-            </a:r>
-            <a:r>
-              <a:rPr lang="ja-JP" altLang="en-US" sz="1150" dirty="0">
-                <a:solidFill>
-                  <a:srgbClr val="383838"/>
-                </a:solidFill>
-                <a:latin typeface="DM Sans" pitchFamily="34" charset="0"/>
-                <a:ea typeface="DM Sans" pitchFamily="34" charset="-122"/>
-                <a:cs typeface="DM Sans" pitchFamily="34" charset="-120"/>
-              </a:rPr>
-              <a:t>を。</a:t>
-            </a:r>
-            <a:endParaRPr lang="ja-JP" sz="1150" dirty="0"/>
-          </a:p>
-        </p:txBody>
-      </p:sp>
-      <p:sp>
-        <p:nvSpPr>
-          <p:cNvPr id="5" name="Text 2"/>
-          <p:cNvSpPr/>
-          <p:nvPr/>
-        </p:nvSpPr>
-        <p:spPr>
-          <a:xfrm>
-            <a:off x="661475" y="1756569"/>
-            <a:ext cx="302411" cy="189012"/>
-          </a:xfrm>
-          <a:prstGeom prst="rect">
-            <a:avLst/>
-          </a:prstGeom>
-          <a:noFill/>
-          <a:ln/>
-        </p:spPr>
-        <p:txBody>
-          <a:bodyPr wrap="none" lIns="0" tIns="0" rIns="0" bIns="0" rtlCol="0" anchor="ctr"/>
-          <a:lstStyle/>
-          <a:p>
-            <a:pPr marL="0" indent="0" algn="l">
-              <a:lnSpc>
-                <a:spcPct val="100000"/>
-              </a:lnSpc>
-              <a:buNone/>
-            </a:pPr>
-            <a:r>
-              <a:rPr lang="en-US" sz="1150" dirty="0">
-                <a:solidFill>
-                  <a:srgbClr val="383838"/>
-                </a:solidFill>
-                <a:latin typeface="PT Serif Light" pitchFamily="34" charset="0"/>
-                <a:ea typeface="PT Serif Light" pitchFamily="34" charset="-122"/>
-                <a:cs typeface="PT Serif Light" pitchFamily="34" charset="-120"/>
-              </a:rPr>
-              <a:t>01</a:t>
-            </a:r>
-            <a:endParaRPr lang="en-US" sz="1150" dirty="0"/>
-          </a:p>
-        </p:txBody>
-      </p:sp>
-      <p:sp>
-        <p:nvSpPr>
-          <p:cNvPr id="6" name="Shape 3"/>
-          <p:cNvSpPr/>
-          <p:nvPr/>
-        </p:nvSpPr>
-        <p:spPr>
-          <a:xfrm>
-            <a:off x="661475" y="1994495"/>
-            <a:ext cx="6296860" cy="19050"/>
-          </a:xfrm>
-          <a:prstGeom prst="rect">
-            <a:avLst/>
-          </a:prstGeom>
-          <a:solidFill>
-            <a:srgbClr val="E04F00"/>
-          </a:solidFill>
-          <a:ln/>
-        </p:spPr>
-        <p:txBody>
-          <a:bodyPr/>
-          <a:lstStyle/>
-          <a:p>
-            <a:endParaRPr lang="ja-JP" altLang="en-US"/>
-          </a:p>
-        </p:txBody>
-      </p:sp>
-      <p:sp>
-        <p:nvSpPr>
-          <p:cNvPr id="7" name="Text 4"/>
-          <p:cNvSpPr/>
-          <p:nvPr/>
-        </p:nvSpPr>
-        <p:spPr>
-          <a:xfrm>
-            <a:off x="661475" y="2108200"/>
-            <a:ext cx="1984623" cy="248047"/>
-          </a:xfrm>
-          <a:prstGeom prst="rect">
-            <a:avLst/>
-          </a:prstGeom>
-          <a:noFill/>
-          <a:ln/>
-        </p:spPr>
-        <p:txBody>
-          <a:bodyPr wrap="none" lIns="0" tIns="0" rIns="0" bIns="0" rtlCol="0" anchor="t"/>
-          <a:lstStyle/>
-          <a:p>
-            <a:pPr marL="0" indent="0" algn="l">
-              <a:lnSpc>
-                <a:spcPct val="104000"/>
-              </a:lnSpc>
-              <a:buNone/>
-            </a:pPr>
-            <a:r>
-              <a:rPr lang="ja-JP" altLang="en-US" sz="1550" dirty="0">
-                <a:solidFill>
-                  <a:srgbClr val="383838"/>
-                </a:solidFill>
-                <a:latin typeface="PT Serif" pitchFamily="34" charset="0"/>
-                <a:ea typeface="PT Serif" pitchFamily="34" charset="-122"/>
-                <a:cs typeface="PT Serif" pitchFamily="34" charset="-120"/>
-              </a:rPr>
-              <a:t>プロトタイプ開発</a:t>
-            </a:r>
-            <a:endParaRPr lang="ja-JP" sz="1550" dirty="0"/>
-          </a:p>
-        </p:txBody>
-      </p:sp>
-      <p:sp>
-        <p:nvSpPr>
-          <p:cNvPr id="8" name="Text 5"/>
-          <p:cNvSpPr/>
-          <p:nvPr/>
-        </p:nvSpPr>
-        <p:spPr>
-          <a:xfrm>
-            <a:off x="661475" y="2428776"/>
-            <a:ext cx="6296860" cy="217686"/>
-          </a:xfrm>
-          <a:prstGeom prst="rect">
-            <a:avLst/>
-          </a:prstGeom>
-          <a:noFill/>
-          <a:ln/>
-        </p:spPr>
-        <p:txBody>
-          <a:bodyPr wrap="none" lIns="0" tIns="0" rIns="0" bIns="0" rtlCol="0" anchor="t"/>
-          <a:lstStyle/>
-          <a:p>
-            <a:pPr marL="0" indent="0" algn="l">
-              <a:lnSpc>
-                <a:spcPct val="120000"/>
-              </a:lnSpc>
-              <a:buNone/>
-            </a:pPr>
-            <a:r>
-              <a:rPr lang="ja-JP" altLang="en-US" sz="1150" dirty="0">
-                <a:solidFill>
-                  <a:srgbClr val="383838"/>
-                </a:solidFill>
-                <a:latin typeface="DM Sans" pitchFamily="34" charset="0"/>
-                <a:ea typeface="DM Sans" pitchFamily="34" charset="-122"/>
-                <a:cs typeface="DM Sans" pitchFamily="34" charset="-120"/>
-              </a:rPr>
-              <a:t>スコア入力・ヒートマップ表示の実装</a:t>
-            </a:r>
-            <a:endParaRPr lang="ja-JP" sz="1150" dirty="0"/>
-          </a:p>
-        </p:txBody>
-      </p:sp>
-      <p:sp>
-        <p:nvSpPr>
-          <p:cNvPr id="9" name="Text 6"/>
-          <p:cNvSpPr/>
-          <p:nvPr/>
-        </p:nvSpPr>
-        <p:spPr>
-          <a:xfrm>
-            <a:off x="661475" y="2880816"/>
-            <a:ext cx="302411" cy="189012"/>
-          </a:xfrm>
-          <a:prstGeom prst="rect">
-            <a:avLst/>
-          </a:prstGeom>
-          <a:noFill/>
-          <a:ln/>
-        </p:spPr>
-        <p:txBody>
-          <a:bodyPr wrap="none" lIns="0" tIns="0" rIns="0" bIns="0" rtlCol="0" anchor="ctr"/>
-          <a:lstStyle/>
-          <a:p>
-            <a:pPr marL="0" indent="0" algn="l">
-              <a:lnSpc>
-                <a:spcPct val="100000"/>
-              </a:lnSpc>
-              <a:buNone/>
-            </a:pPr>
-            <a:r>
-              <a:rPr lang="en-US" sz="1150" dirty="0">
-                <a:solidFill>
-                  <a:srgbClr val="383838"/>
-                </a:solidFill>
-                <a:latin typeface="PT Serif Light" pitchFamily="34" charset="0"/>
-                <a:ea typeface="PT Serif Light" pitchFamily="34" charset="-122"/>
-                <a:cs typeface="PT Serif Light" pitchFamily="34" charset="-120"/>
-              </a:rPr>
-              <a:t>02</a:t>
-            </a:r>
-            <a:endParaRPr lang="en-US" sz="1150" dirty="0"/>
-          </a:p>
-        </p:txBody>
-      </p:sp>
-      <p:sp>
-        <p:nvSpPr>
-          <p:cNvPr id="10" name="Shape 7"/>
-          <p:cNvSpPr/>
-          <p:nvPr/>
-        </p:nvSpPr>
-        <p:spPr>
-          <a:xfrm>
-            <a:off x="661475" y="3118743"/>
-            <a:ext cx="6296860" cy="19050"/>
-          </a:xfrm>
-          <a:prstGeom prst="rect">
-            <a:avLst/>
-          </a:prstGeom>
-          <a:solidFill>
-            <a:srgbClr val="E04F00"/>
-          </a:solidFill>
-          <a:ln/>
-        </p:spPr>
-        <p:txBody>
-          <a:bodyPr/>
-          <a:lstStyle/>
-          <a:p>
-            <a:endParaRPr lang="ja-JP" altLang="en-US"/>
-          </a:p>
-        </p:txBody>
-      </p:sp>
-      <p:sp>
-        <p:nvSpPr>
-          <p:cNvPr id="11" name="Text 8"/>
-          <p:cNvSpPr/>
-          <p:nvPr/>
-        </p:nvSpPr>
-        <p:spPr>
-          <a:xfrm>
-            <a:off x="661475" y="3232448"/>
-            <a:ext cx="1984623" cy="248047"/>
-          </a:xfrm>
-          <a:prstGeom prst="rect">
-            <a:avLst/>
-          </a:prstGeom>
-          <a:noFill/>
-          <a:ln/>
-        </p:spPr>
-        <p:txBody>
-          <a:bodyPr wrap="none" lIns="0" tIns="0" rIns="0" bIns="0" rtlCol="0" anchor="t"/>
-          <a:lstStyle/>
-          <a:p>
-            <a:pPr marL="0" indent="0" algn="l">
-              <a:lnSpc>
-                <a:spcPct val="104000"/>
-              </a:lnSpc>
-              <a:buNone/>
-            </a:pPr>
-            <a:r>
-              <a:rPr lang="ja-JP" altLang="en-US" sz="1550" dirty="0">
-                <a:solidFill>
-                  <a:srgbClr val="383838"/>
-                </a:solidFill>
-                <a:latin typeface="PT Serif" pitchFamily="34" charset="0"/>
-                <a:ea typeface="PT Serif" pitchFamily="34" charset="-122"/>
-                <a:cs typeface="PT Serif" pitchFamily="34" charset="-120"/>
-              </a:rPr>
-              <a:t>AIコーチ連携</a:t>
-            </a:r>
-            <a:endParaRPr lang="ja-JP" sz="1550" dirty="0"/>
-          </a:p>
-        </p:txBody>
-      </p:sp>
-      <p:sp>
-        <p:nvSpPr>
-          <p:cNvPr id="12" name="Text 9"/>
-          <p:cNvSpPr/>
-          <p:nvPr/>
-        </p:nvSpPr>
-        <p:spPr>
-          <a:xfrm>
-            <a:off x="661475" y="3553023"/>
-            <a:ext cx="6296860" cy="217686"/>
-          </a:xfrm>
-          <a:prstGeom prst="rect">
-            <a:avLst/>
-          </a:prstGeom>
-          <a:noFill/>
-          <a:ln/>
-        </p:spPr>
-        <p:txBody>
-          <a:bodyPr wrap="none" lIns="0" tIns="0" rIns="0" bIns="0" rtlCol="0" anchor="t"/>
-          <a:lstStyle/>
-          <a:p>
-            <a:pPr marL="0" indent="0" algn="l">
-              <a:lnSpc>
-                <a:spcPct val="120000"/>
-              </a:lnSpc>
-              <a:buNone/>
-            </a:pPr>
-            <a:r>
-              <a:rPr lang="ja-JP" altLang="en-US" sz="1150" dirty="0">
-                <a:solidFill>
-                  <a:srgbClr val="383838"/>
-                </a:solidFill>
-                <a:latin typeface="DM Sans" pitchFamily="34" charset="0"/>
-                <a:ea typeface="DM Sans" pitchFamily="34" charset="-122"/>
-                <a:cs typeface="DM Sans" pitchFamily="34" charset="-120"/>
-              </a:rPr>
-              <a:t>投球データ分析エンジンの組み込み</a:t>
-            </a:r>
-            <a:endParaRPr lang="ja-JP" sz="1150" dirty="0"/>
-          </a:p>
-        </p:txBody>
-      </p:sp>
-      <p:sp>
-        <p:nvSpPr>
-          <p:cNvPr id="13" name="Text 10"/>
-          <p:cNvSpPr/>
-          <p:nvPr/>
-        </p:nvSpPr>
-        <p:spPr>
-          <a:xfrm>
-            <a:off x="661475" y="4005064"/>
-            <a:ext cx="302411" cy="189012"/>
-          </a:xfrm>
-          <a:prstGeom prst="rect">
-            <a:avLst/>
-          </a:prstGeom>
-          <a:noFill/>
-          <a:ln/>
-        </p:spPr>
-        <p:txBody>
-          <a:bodyPr wrap="none" lIns="0" tIns="0" rIns="0" bIns="0" rtlCol="0" anchor="ctr"/>
-          <a:lstStyle/>
-          <a:p>
-            <a:pPr marL="0" indent="0" algn="l">
-              <a:lnSpc>
-                <a:spcPct val="100000"/>
-              </a:lnSpc>
-              <a:buNone/>
-            </a:pPr>
-            <a:r>
-              <a:rPr lang="en-US" sz="1150" dirty="0">
-                <a:solidFill>
-                  <a:srgbClr val="383838"/>
-                </a:solidFill>
-                <a:latin typeface="PT Serif Light" pitchFamily="34" charset="0"/>
-                <a:ea typeface="PT Serif Light" pitchFamily="34" charset="-122"/>
-                <a:cs typeface="PT Serif Light" pitchFamily="34" charset="-120"/>
-              </a:rPr>
-              <a:t>03</a:t>
-            </a:r>
-            <a:endParaRPr lang="en-US" sz="1150" dirty="0"/>
-          </a:p>
-        </p:txBody>
-      </p:sp>
-      <p:sp>
-        <p:nvSpPr>
-          <p:cNvPr id="14" name="Shape 11"/>
-          <p:cNvSpPr/>
-          <p:nvPr/>
-        </p:nvSpPr>
-        <p:spPr>
-          <a:xfrm>
-            <a:off x="661475" y="4242991"/>
-            <a:ext cx="6296860" cy="19050"/>
-          </a:xfrm>
-          <a:prstGeom prst="rect">
-            <a:avLst/>
-          </a:prstGeom>
-          <a:solidFill>
-            <a:srgbClr val="E04F00"/>
-          </a:solidFill>
-          <a:ln/>
-        </p:spPr>
-        <p:txBody>
-          <a:bodyPr/>
-          <a:lstStyle/>
-          <a:p>
-            <a:endParaRPr lang="ja-JP" altLang="en-US"/>
-          </a:p>
-        </p:txBody>
-      </p:sp>
-      <p:sp>
-        <p:nvSpPr>
-          <p:cNvPr id="15" name="Text 12"/>
-          <p:cNvSpPr/>
-          <p:nvPr/>
-        </p:nvSpPr>
-        <p:spPr>
-          <a:xfrm>
-            <a:off x="661475" y="4356695"/>
-            <a:ext cx="1984623" cy="248047"/>
-          </a:xfrm>
-          <a:prstGeom prst="rect">
-            <a:avLst/>
-          </a:prstGeom>
-          <a:noFill/>
-          <a:ln/>
-        </p:spPr>
-        <p:txBody>
-          <a:bodyPr wrap="none" lIns="0" tIns="0" rIns="0" bIns="0" rtlCol="0" anchor="t"/>
-          <a:lstStyle/>
-          <a:p>
-            <a:pPr marL="0" indent="0" algn="l">
-              <a:lnSpc>
-                <a:spcPct val="104000"/>
-              </a:lnSpc>
-              <a:buNone/>
-            </a:pPr>
-            <a:r>
-              <a:rPr lang="ja-JP" altLang="en-US" sz="1550" dirty="0">
-                <a:solidFill>
-                  <a:srgbClr val="383838"/>
-                </a:solidFill>
-                <a:latin typeface="PT Serif" pitchFamily="34" charset="0"/>
-                <a:ea typeface="PT Serif" pitchFamily="34" charset="-122"/>
-                <a:cs typeface="PT Serif" pitchFamily="34" charset="-120"/>
-              </a:rPr>
-              <a:t>フィールドテスト</a:t>
-            </a:r>
-            <a:endParaRPr lang="ja-JP" sz="1550" dirty="0"/>
-          </a:p>
-        </p:txBody>
-      </p:sp>
-      <p:sp>
-        <p:nvSpPr>
-          <p:cNvPr id="16" name="Text 13"/>
-          <p:cNvSpPr/>
-          <p:nvPr/>
-        </p:nvSpPr>
-        <p:spPr>
-          <a:xfrm>
-            <a:off x="661475" y="4677271"/>
-            <a:ext cx="6296860" cy="217686"/>
-          </a:xfrm>
-          <a:prstGeom prst="rect">
-            <a:avLst/>
-          </a:prstGeom>
-          <a:noFill/>
-          <a:ln/>
-        </p:spPr>
-        <p:txBody>
-          <a:bodyPr wrap="none" lIns="0" tIns="0" rIns="0" bIns="0" rtlCol="0" anchor="t"/>
-          <a:lstStyle/>
-          <a:p>
-            <a:pPr marL="0" indent="0" algn="l">
-              <a:lnSpc>
-                <a:spcPct val="120000"/>
-              </a:lnSpc>
-              <a:buNone/>
-            </a:pPr>
-            <a:r>
-              <a:rPr lang="ja-JP" altLang="en-US" sz="1150" dirty="0">
-                <a:solidFill>
-                  <a:srgbClr val="383838"/>
-                </a:solidFill>
-                <a:latin typeface="DM Sans" pitchFamily="34" charset="0"/>
-                <a:ea typeface="DM Sans" pitchFamily="34" charset="-122"/>
-                <a:cs typeface="DM Sans" pitchFamily="34" charset="-120"/>
-              </a:rPr>
-              <a:t>ボウリング場での実証・フィードバック収集</a:t>
-            </a:r>
-            <a:endParaRPr lang="ja-JP" sz="1150" dirty="0"/>
-          </a:p>
-        </p:txBody>
-      </p:sp>
-      <p:sp>
-        <p:nvSpPr>
-          <p:cNvPr id="17" name="Text 14"/>
-          <p:cNvSpPr/>
-          <p:nvPr/>
-        </p:nvSpPr>
-        <p:spPr>
-          <a:xfrm>
-            <a:off x="661475" y="5129312"/>
-            <a:ext cx="302411" cy="189012"/>
-          </a:xfrm>
-          <a:prstGeom prst="rect">
-            <a:avLst/>
-          </a:prstGeom>
-          <a:noFill/>
-          <a:ln/>
-        </p:spPr>
-        <p:txBody>
-          <a:bodyPr wrap="none" lIns="0" tIns="0" rIns="0" bIns="0" rtlCol="0" anchor="ctr"/>
-          <a:lstStyle/>
-          <a:p>
-            <a:pPr marL="0" indent="0" algn="l">
-              <a:lnSpc>
-                <a:spcPct val="100000"/>
-              </a:lnSpc>
-              <a:buNone/>
-            </a:pPr>
-            <a:r>
-              <a:rPr lang="en-US" sz="1150" dirty="0">
-                <a:solidFill>
-                  <a:srgbClr val="383838"/>
-                </a:solidFill>
-                <a:latin typeface="PT Serif Light" pitchFamily="34" charset="0"/>
-                <a:ea typeface="PT Serif Light" pitchFamily="34" charset="-122"/>
-                <a:cs typeface="PT Serif Light" pitchFamily="34" charset="-120"/>
-              </a:rPr>
-              <a:t>04</a:t>
-            </a:r>
-            <a:endParaRPr lang="en-US" sz="1150" dirty="0"/>
-          </a:p>
-        </p:txBody>
-      </p:sp>
-      <p:sp>
-        <p:nvSpPr>
-          <p:cNvPr id="18" name="Shape 15"/>
-          <p:cNvSpPr/>
-          <p:nvPr/>
-        </p:nvSpPr>
-        <p:spPr>
-          <a:xfrm>
-            <a:off x="661475" y="5367238"/>
-            <a:ext cx="6296860" cy="19050"/>
-          </a:xfrm>
-          <a:prstGeom prst="rect">
-            <a:avLst/>
-          </a:prstGeom>
-          <a:solidFill>
-            <a:srgbClr val="E04F00"/>
-          </a:solidFill>
-          <a:ln/>
-        </p:spPr>
-        <p:txBody>
-          <a:bodyPr/>
-          <a:lstStyle/>
-          <a:p>
-            <a:endParaRPr lang="ja-JP" altLang="en-US"/>
-          </a:p>
-        </p:txBody>
-      </p:sp>
-      <p:sp>
-        <p:nvSpPr>
-          <p:cNvPr id="19" name="Text 16"/>
-          <p:cNvSpPr/>
-          <p:nvPr/>
-        </p:nvSpPr>
-        <p:spPr>
-          <a:xfrm>
-            <a:off x="661475" y="5480943"/>
-            <a:ext cx="1984623" cy="248047"/>
-          </a:xfrm>
-          <a:prstGeom prst="rect">
-            <a:avLst/>
-          </a:prstGeom>
-          <a:noFill/>
-          <a:ln/>
-        </p:spPr>
-        <p:txBody>
-          <a:bodyPr wrap="none" lIns="0" tIns="0" rIns="0" bIns="0" rtlCol="0" anchor="t"/>
-          <a:lstStyle/>
-          <a:p>
-            <a:pPr marL="0" indent="0" algn="l">
-              <a:lnSpc>
-                <a:spcPct val="104000"/>
-              </a:lnSpc>
-              <a:buNone/>
-            </a:pPr>
-            <a:r>
-              <a:rPr lang="ja-JP" altLang="en-US" sz="1550" dirty="0">
-                <a:solidFill>
-                  <a:srgbClr val="383838"/>
-                </a:solidFill>
-                <a:latin typeface="PT Serif" pitchFamily="34" charset="0"/>
-                <a:ea typeface="PT Serif" pitchFamily="34" charset="-122"/>
-                <a:cs typeface="PT Serif" pitchFamily="34" charset="-120"/>
-              </a:rPr>
-              <a:t>ローンチ</a:t>
-            </a:r>
-            <a:endParaRPr lang="ja-JP" sz="1550" dirty="0"/>
-          </a:p>
-        </p:txBody>
-      </p:sp>
-      <p:sp>
-        <p:nvSpPr>
-          <p:cNvPr id="20" name="Text 17"/>
-          <p:cNvSpPr/>
-          <p:nvPr/>
-        </p:nvSpPr>
-        <p:spPr>
-          <a:xfrm>
-            <a:off x="661475" y="5801519"/>
-            <a:ext cx="6296860" cy="217686"/>
-          </a:xfrm>
-          <a:prstGeom prst="rect">
-            <a:avLst/>
-          </a:prstGeom>
-          <a:noFill/>
-          <a:ln/>
-        </p:spPr>
-        <p:txBody>
-          <a:bodyPr wrap="none" lIns="0" tIns="0" rIns="0" bIns="0" rtlCol="0" anchor="t"/>
-          <a:lstStyle/>
-          <a:p>
-            <a:pPr marL="0" indent="0" algn="l">
-              <a:lnSpc>
-                <a:spcPct val="120000"/>
-              </a:lnSpc>
-              <a:buNone/>
-            </a:pPr>
-            <a:r>
-              <a:rPr lang="ja-JP" altLang="en-US" sz="1150" dirty="0">
-                <a:solidFill>
-                  <a:srgbClr val="383838"/>
-                </a:solidFill>
-                <a:latin typeface="DM Sans" pitchFamily="34" charset="0"/>
-                <a:ea typeface="DM Sans" pitchFamily="34" charset="-122"/>
-                <a:cs typeface="DM Sans" pitchFamily="34" charset="-120"/>
-              </a:rPr>
-              <a:t>アプリストア公開・ボウリング場展開</a:t>
-            </a:r>
             <a:endParaRPr lang="ja-JP" sz="1150" dirty="0"/>
           </a:p>
         </p:txBody>
@@ -2526,13 +1687,16 @@
                 <a:solidFill>
                   <a:srgbClr val="020202"/>
                 </a:solidFill>
-                <a:latin typeface="PT Serif" pitchFamily="34" charset="0"/>
-                <a:ea typeface="PT Serif" pitchFamily="34" charset="-122"/>
+                <a:latin typeface="Meiryo UI" panose="020B0604030504040204" pitchFamily="50" charset="-128"/>
+                <a:ea typeface="Meiryo UI" panose="020B0604030504040204" pitchFamily="50" charset="-128"/>
                 <a:cs typeface="PT Serif" pitchFamily="34" charset="-120"/>
               </a:rPr>
               <a:t>ボウラーが直面する3つの壁</a:t>
             </a:r>
-            <a:endParaRPr lang="ja-JP" sz="3900" dirty="0"/>
+            <a:endParaRPr lang="ja-JP" sz="3900" dirty="0">
+              <a:latin typeface="Meiryo UI" panose="020B0604030504040204" pitchFamily="50" charset="-128"/>
+              <a:ea typeface="Meiryo UI" panose="020B0604030504040204" pitchFamily="50" charset="-128"/>
+            </a:endParaRPr>
           </a:p>
         </p:txBody>
       </p:sp>
@@ -2595,26 +1759,29 @@
             <a:r>
               <a:rPr lang="ja-JP" altLang="en-US" sz="1950" dirty="0">
                 <a:solidFill>
-                  <a:srgbClr val="000000"/>
+                  <a:srgbClr val="383838"/>
                 </a:solidFill>
                 <a:latin typeface="PT Serif" pitchFamily="34" charset="0"/>
                 <a:ea typeface="PT Serif" pitchFamily="34" charset="-122"/>
                 <a:cs typeface="PT Serif" pitchFamily="34" charset="-120"/>
               </a:rPr>
-              <a:t>🎳</a:t>
+              <a:t> </a:t>
             </a:r>
             <a:r>
               <a:rPr lang="ja-JP" altLang="en-US" sz="1950" dirty="0">
                 <a:solidFill>
                   <a:srgbClr val="383838"/>
                 </a:solidFill>
-                <a:latin typeface="PT Serif" pitchFamily="34" charset="0"/>
-                <a:ea typeface="PT Serif" pitchFamily="34" charset="-122"/>
+                <a:latin typeface="Meiryo UI" panose="020B0604030504040204" pitchFamily="50" charset="-128"/>
+                <a:ea typeface="Meiryo UI" panose="020B0604030504040204" pitchFamily="50" charset="-128"/>
                 <a:cs typeface="PT Serif" pitchFamily="34" charset="-120"/>
               </a:rPr>
-              <a:t> 弱点がわからない</a:t>
-            </a:r>
-            <a:endParaRPr lang="ja-JP" sz="1950" dirty="0"/>
+              <a:t>弱点がわからない</a:t>
+            </a:r>
+            <a:endParaRPr lang="ja-JP" sz="1950" dirty="0">
+              <a:latin typeface="Meiryo UI" panose="020B0604030504040204" pitchFamily="50" charset="-128"/>
+              <a:ea typeface="Meiryo UI" panose="020B0604030504040204" pitchFamily="50" charset="-128"/>
+            </a:endParaRPr>
           </a:p>
         </p:txBody>
       </p:sp>
@@ -2652,13 +1819,16 @@
                 <a:solidFill>
                   <a:srgbClr val="383838"/>
                 </a:solidFill>
-                <a:latin typeface="DM Sans" pitchFamily="34" charset="0"/>
-                <a:ea typeface="DM Sans" pitchFamily="34" charset="-122"/>
+                <a:latin typeface="Meiryo UI" panose="020B0604030504040204" pitchFamily="50" charset="-128"/>
+                <a:ea typeface="Meiryo UI" panose="020B0604030504040204" pitchFamily="50" charset="-128"/>
                 <a:cs typeface="DM Sans" pitchFamily="34" charset="-120"/>
               </a:rPr>
               <a:t>レーン・メンテナンスの影響で、自分の残ピン傾向を把握できない</a:t>
             </a:r>
-            <a:endParaRPr lang="ja-JP" sz="1450" dirty="0"/>
+            <a:endParaRPr lang="ja-JP" sz="1450" dirty="0">
+              <a:latin typeface="Meiryo UI" panose="020B0604030504040204" pitchFamily="50" charset="-128"/>
+              <a:ea typeface="Meiryo UI" panose="020B0604030504040204" pitchFamily="50" charset="-128"/>
+            </a:endParaRPr>
           </a:p>
         </p:txBody>
       </p:sp>
@@ -2721,26 +1891,29 @@
             <a:r>
               <a:rPr lang="ja-JP" altLang="en-US" sz="1950" dirty="0">
                 <a:solidFill>
-                  <a:srgbClr val="000000"/>
+                  <a:srgbClr val="383838"/>
                 </a:solidFill>
                 <a:latin typeface="PT Serif" pitchFamily="34" charset="0"/>
                 <a:ea typeface="PT Serif" pitchFamily="34" charset="-122"/>
                 <a:cs typeface="PT Serif" pitchFamily="34" charset="-120"/>
               </a:rPr>
-              <a:t>💸</a:t>
+              <a:t> </a:t>
             </a:r>
             <a:r>
               <a:rPr lang="ja-JP" altLang="en-US" sz="1950" dirty="0">
                 <a:solidFill>
                   <a:srgbClr val="383838"/>
                 </a:solidFill>
-                <a:latin typeface="PT Serif" pitchFamily="34" charset="0"/>
-                <a:ea typeface="PT Serif" pitchFamily="34" charset="-122"/>
+                <a:latin typeface="Meiryo UI" panose="020B0604030504040204" pitchFamily="50" charset="-128"/>
+                <a:ea typeface="Meiryo UI" panose="020B0604030504040204" pitchFamily="50" charset="-128"/>
                 <a:cs typeface="PT Serif" pitchFamily="34" charset="-120"/>
               </a:rPr>
-              <a:t> コーチングが高額</a:t>
-            </a:r>
-            <a:endParaRPr lang="ja-JP" sz="1950" dirty="0"/>
+              <a:t>コーチングが高額</a:t>
+            </a:r>
+            <a:endParaRPr lang="ja-JP" sz="1950" dirty="0">
+              <a:latin typeface="Meiryo UI" panose="020B0604030504040204" pitchFamily="50" charset="-128"/>
+              <a:ea typeface="Meiryo UI" panose="020B0604030504040204" pitchFamily="50" charset="-128"/>
+            </a:endParaRPr>
           </a:p>
         </p:txBody>
       </p:sp>
@@ -2778,13 +1951,16 @@
                 <a:solidFill>
                   <a:srgbClr val="383838"/>
                 </a:solidFill>
-                <a:latin typeface="DM Sans" pitchFamily="34" charset="0"/>
-                <a:ea typeface="DM Sans" pitchFamily="34" charset="-122"/>
+                <a:latin typeface="Meiryo UI" panose="020B0604030504040204" pitchFamily="50" charset="-128"/>
+                <a:ea typeface="Meiryo UI" panose="020B0604030504040204" pitchFamily="50" charset="-128"/>
                 <a:cs typeface="DM Sans" pitchFamily="34" charset="-120"/>
               </a:rPr>
               <a:t>プロコーチは費用が高く、日常の改善には不向き</a:t>
             </a:r>
-            <a:endParaRPr lang="ja-JP" sz="1450" dirty="0"/>
+            <a:endParaRPr lang="ja-JP" sz="1450" dirty="0">
+              <a:latin typeface="Meiryo UI" panose="020B0604030504040204" pitchFamily="50" charset="-128"/>
+              <a:ea typeface="Meiryo UI" panose="020B0604030504040204" pitchFamily="50" charset="-128"/>
+            </a:endParaRPr>
           </a:p>
         </p:txBody>
       </p:sp>
@@ -2847,26 +2023,29 @@
             <a:r>
               <a:rPr lang="ja-JP" altLang="en-US" sz="1950" dirty="0">
                 <a:solidFill>
-                  <a:srgbClr val="000000"/>
+                  <a:srgbClr val="383838"/>
                 </a:solidFill>
                 <a:latin typeface="PT Serif" pitchFamily="34" charset="0"/>
                 <a:ea typeface="PT Serif" pitchFamily="34" charset="-122"/>
                 <a:cs typeface="PT Serif" pitchFamily="34" charset="-120"/>
               </a:rPr>
-              <a:t>📊</a:t>
+              <a:t> </a:t>
             </a:r>
             <a:r>
               <a:rPr lang="ja-JP" altLang="en-US" sz="1950" dirty="0">
                 <a:solidFill>
                   <a:srgbClr val="383838"/>
                 </a:solidFill>
-                <a:latin typeface="PT Serif" pitchFamily="34" charset="0"/>
-                <a:ea typeface="PT Serif" pitchFamily="34" charset="-122"/>
+                <a:latin typeface="Meiryo UI" panose="020B0604030504040204" pitchFamily="50" charset="-128"/>
+                <a:ea typeface="Meiryo UI" panose="020B0604030504040204" pitchFamily="50" charset="-128"/>
                 <a:cs typeface="PT Serif" pitchFamily="34" charset="-120"/>
               </a:rPr>
-              <a:t> データが眠っている</a:t>
-            </a:r>
-            <a:endParaRPr lang="ja-JP" sz="1950" dirty="0"/>
+              <a:t>データが眠っている</a:t>
+            </a:r>
+            <a:endParaRPr lang="ja-JP" sz="1950" dirty="0">
+              <a:latin typeface="Meiryo UI" panose="020B0604030504040204" pitchFamily="50" charset="-128"/>
+              <a:ea typeface="Meiryo UI" panose="020B0604030504040204" pitchFamily="50" charset="-128"/>
+            </a:endParaRPr>
           </a:p>
         </p:txBody>
       </p:sp>
@@ -2902,13 +2081,16 @@
                 <a:solidFill>
                   <a:srgbClr val="383838"/>
                 </a:solidFill>
-                <a:latin typeface="DM Sans" pitchFamily="34" charset="0"/>
-                <a:ea typeface="DM Sans" pitchFamily="34" charset="-122"/>
+                <a:latin typeface="Meiryo UI" panose="020B0604030504040204" pitchFamily="50" charset="-128"/>
+                <a:ea typeface="Meiryo UI" panose="020B0604030504040204" pitchFamily="50" charset="-128"/>
                 <a:cs typeface="DM Sans" pitchFamily="34" charset="-120"/>
               </a:rPr>
               <a:t>ボウリング場は顧客のプレイデータを十分に活用できていない</a:t>
             </a:r>
-            <a:endParaRPr lang="ja-JP" sz="1450" dirty="0"/>
+            <a:endParaRPr lang="ja-JP" sz="1450" dirty="0">
+              <a:latin typeface="Meiryo UI" panose="020B0604030504040204" pitchFamily="50" charset="-128"/>
+              <a:ea typeface="Meiryo UI" panose="020B0604030504040204" pitchFamily="50" charset="-128"/>
+            </a:endParaRPr>
           </a:p>
         </p:txBody>
       </p:sp>
@@ -2969,13 +2151,16 @@
                 <a:solidFill>
                   <a:srgbClr val="020202"/>
                 </a:solidFill>
-                <a:latin typeface="PT Serif" pitchFamily="34" charset="0"/>
-                <a:ea typeface="PT Serif" pitchFamily="34" charset="-122"/>
+                <a:latin typeface="Meiryo UI" panose="020B0604030504040204" pitchFamily="50" charset="-128"/>
+                <a:ea typeface="Meiryo UI" panose="020B0604030504040204" pitchFamily="50" charset="-128"/>
                 <a:cs typeface="PT Serif" pitchFamily="34" charset="-120"/>
               </a:rPr>
-              <a:t>AI Bowling Master が解決します</a:t>
-            </a:r>
-            <a:endParaRPr lang="ja-JP" sz="3650" dirty="0"/>
+              <a:t>AI Bowling Master</a:t>
+            </a:r>
+            <a:endParaRPr lang="ja-JP" sz="3650" dirty="0">
+              <a:latin typeface="Meiryo UI" panose="020B0604030504040204" pitchFamily="50" charset="-128"/>
+              <a:ea typeface="Meiryo UI" panose="020B0604030504040204" pitchFamily="50" charset="-128"/>
+            </a:endParaRPr>
           </a:p>
         </p:txBody>
       </p:sp>
@@ -3067,13 +2252,16 @@
                 <a:solidFill>
                   <a:srgbClr val="383838"/>
                 </a:solidFill>
-                <a:latin typeface="PT Serif" pitchFamily="34" charset="0"/>
-                <a:ea typeface="PT Serif" pitchFamily="34" charset="-122"/>
+                <a:latin typeface="Meiryo UI" panose="020B0604030504040204" pitchFamily="50" charset="-128"/>
+                <a:ea typeface="Meiryo UI" panose="020B0604030504040204" pitchFamily="50" charset="-128"/>
                 <a:cs typeface="PT Serif" pitchFamily="34" charset="-120"/>
               </a:rPr>
               <a:t>スコア＆投球履歴の取り込み</a:t>
             </a:r>
-            <a:endParaRPr lang="ja-JP" sz="1800" dirty="0"/>
+            <a:endParaRPr lang="ja-JP" sz="1800" dirty="0">
+              <a:latin typeface="Meiryo UI" panose="020B0604030504040204" pitchFamily="50" charset="-128"/>
+              <a:ea typeface="Meiryo UI" panose="020B0604030504040204" pitchFamily="50" charset="-128"/>
+            </a:endParaRPr>
           </a:p>
         </p:txBody>
       </p:sp>
@@ -3109,13 +2297,16 @@
                 <a:solidFill>
                   <a:srgbClr val="383838"/>
                 </a:solidFill>
-                <a:latin typeface="DM Sans" pitchFamily="34" charset="0"/>
-                <a:ea typeface="DM Sans" pitchFamily="34" charset="-122"/>
+                <a:latin typeface="Meiryo UI" panose="020B0604030504040204" pitchFamily="50" charset="-128"/>
+                <a:ea typeface="Meiryo UI" panose="020B0604030504040204" pitchFamily="50" charset="-128"/>
                 <a:cs typeface="DM Sans" pitchFamily="34" charset="-120"/>
               </a:rPr>
               <a:t>手入力・OCRで簡単記録</a:t>
             </a:r>
-            <a:endParaRPr lang="ja-JP" sz="1350" dirty="0"/>
+            <a:endParaRPr lang="ja-JP" sz="1350" dirty="0">
+              <a:latin typeface="Meiryo UI" panose="020B0604030504040204" pitchFamily="50" charset="-128"/>
+              <a:ea typeface="Meiryo UI" panose="020B0604030504040204" pitchFamily="50" charset="-128"/>
+            </a:endParaRPr>
           </a:p>
         </p:txBody>
       </p:sp>
@@ -3181,13 +2372,16 @@
                 <a:solidFill>
                   <a:srgbClr val="383838"/>
                 </a:solidFill>
-                <a:latin typeface="PT Serif" pitchFamily="34" charset="0"/>
-                <a:ea typeface="PT Serif" pitchFamily="34" charset="-122"/>
+                <a:latin typeface="Meiryo UI" panose="020B0604030504040204" pitchFamily="50" charset="-128"/>
+                <a:ea typeface="Meiryo UI" panose="020B0604030504040204" pitchFamily="50" charset="-128"/>
                 <a:cs typeface="PT Serif" pitchFamily="34" charset="-120"/>
               </a:rPr>
               <a:t>レーン別ヒートマップ</a:t>
             </a:r>
-            <a:endParaRPr lang="ja-JP" sz="1800" dirty="0"/>
+            <a:endParaRPr lang="ja-JP" sz="1800" dirty="0">
+              <a:latin typeface="Meiryo UI" panose="020B0604030504040204" pitchFamily="50" charset="-128"/>
+              <a:ea typeface="Meiryo UI" panose="020B0604030504040204" pitchFamily="50" charset="-128"/>
+            </a:endParaRPr>
           </a:p>
         </p:txBody>
       </p:sp>
@@ -3223,13 +2417,16 @@
                 <a:solidFill>
                   <a:srgbClr val="383838"/>
                 </a:solidFill>
-                <a:latin typeface="DM Sans" pitchFamily="34" charset="0"/>
-                <a:ea typeface="DM Sans" pitchFamily="34" charset="-122"/>
+                <a:latin typeface="Meiryo UI" panose="020B0604030504040204" pitchFamily="50" charset="-128"/>
+                <a:ea typeface="Meiryo UI" panose="020B0604030504040204" pitchFamily="50" charset="-128"/>
                 <a:cs typeface="DM Sans" pitchFamily="34" charset="-120"/>
               </a:rPr>
               <a:t>残ピン分布を視覚化</a:t>
             </a:r>
-            <a:endParaRPr lang="ja-JP" sz="1350" dirty="0"/>
+            <a:endParaRPr lang="ja-JP" sz="1350" dirty="0">
+              <a:latin typeface="Meiryo UI" panose="020B0604030504040204" pitchFamily="50" charset="-128"/>
+              <a:ea typeface="Meiryo UI" panose="020B0604030504040204" pitchFamily="50" charset="-128"/>
+            </a:endParaRPr>
           </a:p>
         </p:txBody>
       </p:sp>
@@ -3295,13 +2492,16 @@
                 <a:solidFill>
                   <a:srgbClr val="383838"/>
                 </a:solidFill>
-                <a:latin typeface="PT Serif" pitchFamily="34" charset="0"/>
-                <a:ea typeface="PT Serif" pitchFamily="34" charset="-122"/>
+                <a:latin typeface="Meiryo UI" panose="020B0604030504040204" pitchFamily="50" charset="-128"/>
+                <a:ea typeface="Meiryo UI" panose="020B0604030504040204" pitchFamily="50" charset="-128"/>
                 <a:cs typeface="PT Serif" pitchFamily="34" charset="-120"/>
               </a:rPr>
               <a:t>AIコーチが即時アドバイス</a:t>
             </a:r>
-            <a:endParaRPr lang="ja-JP" sz="1800" dirty="0"/>
+            <a:endParaRPr lang="ja-JP" sz="1800" dirty="0">
+              <a:latin typeface="Meiryo UI" panose="020B0604030504040204" pitchFamily="50" charset="-128"/>
+              <a:ea typeface="Meiryo UI" panose="020B0604030504040204" pitchFamily="50" charset="-128"/>
+            </a:endParaRPr>
           </a:p>
         </p:txBody>
       </p:sp>
@@ -3337,13 +2537,16 @@
                 <a:solidFill>
                   <a:srgbClr val="383838"/>
                 </a:solidFill>
-                <a:latin typeface="DM Sans" pitchFamily="34" charset="0"/>
-                <a:ea typeface="DM Sans" pitchFamily="34" charset="-122"/>
+                <a:latin typeface="Meiryo UI" panose="020B0604030504040204" pitchFamily="50" charset="-128"/>
+                <a:ea typeface="Meiryo UI" panose="020B0604030504040204" pitchFamily="50" charset="-128"/>
                 <a:cs typeface="DM Sans" pitchFamily="34" charset="-120"/>
               </a:rPr>
               <a:t>ショートテキスト・音声で改善提案</a:t>
             </a:r>
-            <a:endParaRPr lang="ja-JP" sz="1350" dirty="0"/>
+            <a:endParaRPr lang="ja-JP" sz="1350" dirty="0">
+              <a:latin typeface="Meiryo UI" panose="020B0604030504040204" pitchFamily="50" charset="-128"/>
+              <a:ea typeface="Meiryo UI" panose="020B0604030504040204" pitchFamily="50" charset="-128"/>
+            </a:endParaRPr>
           </a:p>
         </p:txBody>
       </p:sp>
@@ -3411,13 +2614,16 @@
                 <a:solidFill>
                   <a:srgbClr val="383838"/>
                 </a:solidFill>
-                <a:latin typeface="PT Serif" pitchFamily="34" charset="0"/>
-                <a:ea typeface="PT Serif" pitchFamily="34" charset="-122"/>
+                <a:latin typeface="Meiryo UI" panose="020B0604030504040204" pitchFamily="50" charset="-128"/>
+                <a:ea typeface="Meiryo UI" panose="020B0604030504040204" pitchFamily="50" charset="-128"/>
                 <a:cs typeface="PT Serif" pitchFamily="34" charset="-120"/>
               </a:rPr>
               <a:t>ローカル保存＋クラウド同期</a:t>
             </a:r>
-            <a:endParaRPr lang="ja-JP" sz="1800" dirty="0"/>
+            <a:endParaRPr lang="ja-JP" sz="1800" dirty="0">
+              <a:latin typeface="Meiryo UI" panose="020B0604030504040204" pitchFamily="50" charset="-128"/>
+              <a:ea typeface="Meiryo UI" panose="020B0604030504040204" pitchFamily="50" charset="-128"/>
+            </a:endParaRPr>
           </a:p>
         </p:txBody>
       </p:sp>
@@ -3453,13 +2659,16 @@
                 <a:solidFill>
                   <a:srgbClr val="383838"/>
                 </a:solidFill>
-                <a:latin typeface="DM Sans" pitchFamily="34" charset="0"/>
-                <a:ea typeface="DM Sans" pitchFamily="34" charset="-122"/>
+                <a:latin typeface="Meiryo UI" panose="020B0604030504040204" pitchFamily="50" charset="-128"/>
+                <a:ea typeface="Meiryo UI" panose="020B0604030504040204" pitchFamily="50" charset="-128"/>
                 <a:cs typeface="DM Sans" pitchFamily="34" charset="-120"/>
               </a:rPr>
               <a:t>現場導入もスムーズ</a:t>
             </a:r>
-            <a:endParaRPr lang="ja-JP" sz="1350" dirty="0"/>
+            <a:endParaRPr lang="ja-JP" sz="1350" dirty="0">
+              <a:latin typeface="Meiryo UI" panose="020B0604030504040204" pitchFamily="50" charset="-128"/>
+              <a:ea typeface="Meiryo UI" panose="020B0604030504040204" pitchFamily="50" charset="-128"/>
+            </a:endParaRPr>
           </a:p>
         </p:txBody>
       </p:sp>
@@ -3546,13 +2755,16 @@
                 <a:solidFill>
                   <a:srgbClr val="020202"/>
                 </a:solidFill>
-                <a:latin typeface="PT Serif" pitchFamily="34" charset="0"/>
-                <a:ea typeface="PT Serif" pitchFamily="34" charset="-122"/>
+                <a:latin typeface="Meiryo UI" panose="020B0604030504040204" pitchFamily="50" charset="-128"/>
+                <a:ea typeface="Meiryo UI" panose="020B0604030504040204" pitchFamily="50" charset="-128"/>
                 <a:cs typeface="PT Serif" pitchFamily="34" charset="-120"/>
               </a:rPr>
               <a:t>レーン別 残ピンヒートマップ</a:t>
             </a:r>
-            <a:endParaRPr lang="ja-JP" sz="3900" dirty="0"/>
+            <a:endParaRPr lang="ja-JP" sz="3900" dirty="0">
+              <a:latin typeface="Meiryo UI" panose="020B0604030504040204" pitchFamily="50" charset="-128"/>
+              <a:ea typeface="Meiryo UI" panose="020B0604030504040204" pitchFamily="50" charset="-128"/>
+            </a:endParaRPr>
           </a:p>
         </p:txBody>
       </p:sp>
@@ -3590,13 +2802,16 @@
                 <a:solidFill>
                   <a:srgbClr val="383838"/>
                 </a:solidFill>
-                <a:latin typeface="DM Sans" pitchFamily="34" charset="0"/>
-                <a:ea typeface="DM Sans" pitchFamily="34" charset="-122"/>
+                <a:latin typeface="Meiryo UI" panose="020B0604030504040204" pitchFamily="50" charset="-128"/>
+                <a:ea typeface="Meiryo UI" panose="020B0604030504040204" pitchFamily="50" charset="-128"/>
                 <a:cs typeface="DM Sans" pitchFamily="34" charset="-120"/>
               </a:rPr>
               <a:t>どのピンが・どのレーンで・どれだけ残っているかを一目で把握。自分の「弱点レーン」が可視化されます。</a:t>
             </a:r>
-            <a:endParaRPr lang="ja-JP" sz="1450" dirty="0"/>
+            <a:endParaRPr lang="ja-JP" sz="1450" dirty="0">
+              <a:latin typeface="Meiryo UI" panose="020B0604030504040204" pitchFamily="50" charset="-128"/>
+              <a:ea typeface="Meiryo UI" panose="020B0604030504040204" pitchFamily="50" charset="-128"/>
+            </a:endParaRPr>
           </a:p>
         </p:txBody>
       </p:sp>
@@ -3686,26 +2901,29 @@
             <a:r>
               <a:rPr lang="ja-JP" altLang="en-US" sz="1950" dirty="0">
                 <a:solidFill>
-                  <a:srgbClr val="000000"/>
+                  <a:srgbClr val="383838"/>
                 </a:solidFill>
                 <a:latin typeface="PT Serif" pitchFamily="34" charset="0"/>
                 <a:ea typeface="PT Serif" pitchFamily="34" charset="-122"/>
                 <a:cs typeface="PT Serif" pitchFamily="34" charset="-120"/>
               </a:rPr>
-              <a:t>📍</a:t>
+              <a:t> </a:t>
             </a:r>
             <a:r>
               <a:rPr lang="ja-JP" altLang="en-US" sz="1950" dirty="0">
                 <a:solidFill>
                   <a:srgbClr val="383838"/>
                 </a:solidFill>
-                <a:latin typeface="PT Serif" pitchFamily="34" charset="0"/>
-                <a:ea typeface="PT Serif" pitchFamily="34" charset="-122"/>
+                <a:latin typeface="Meiryo UI" panose="020B0604030504040204" pitchFamily="50" charset="-128"/>
+                <a:ea typeface="Meiryo UI" panose="020B0604030504040204" pitchFamily="50" charset="-128"/>
                 <a:cs typeface="PT Serif" pitchFamily="34" charset="-120"/>
               </a:rPr>
-              <a:t> レーン分析</a:t>
-            </a:r>
-            <a:endParaRPr lang="ja-JP" sz="1950" dirty="0"/>
+              <a:t>レーン分析</a:t>
+            </a:r>
+            <a:endParaRPr lang="ja-JP" sz="1950" dirty="0">
+              <a:latin typeface="Meiryo UI" panose="020B0604030504040204" pitchFamily="50" charset="-128"/>
+              <a:ea typeface="Meiryo UI" panose="020B0604030504040204" pitchFamily="50" charset="-128"/>
+            </a:endParaRPr>
           </a:p>
         </p:txBody>
       </p:sp>
@@ -3741,13 +2959,16 @@
                 <a:solidFill>
                   <a:srgbClr val="383838"/>
                 </a:solidFill>
-                <a:latin typeface="DM Sans" pitchFamily="34" charset="0"/>
-                <a:ea typeface="DM Sans" pitchFamily="34" charset="-122"/>
+                <a:latin typeface="Meiryo UI" panose="020B0604030504040204" pitchFamily="50" charset="-128"/>
+                <a:ea typeface="Meiryo UI" panose="020B0604030504040204" pitchFamily="50" charset="-128"/>
                 <a:cs typeface="DM Sans" pitchFamily="34" charset="-120"/>
               </a:rPr>
               <a:t>レーンごとの傾向を比較</a:t>
             </a:r>
-            <a:endParaRPr lang="ja-JP" sz="1450" dirty="0"/>
+            <a:endParaRPr lang="ja-JP" sz="1450" dirty="0">
+              <a:latin typeface="Meiryo UI" panose="020B0604030504040204" pitchFamily="50" charset="-128"/>
+              <a:ea typeface="Meiryo UI" panose="020B0604030504040204" pitchFamily="50" charset="-128"/>
+            </a:endParaRPr>
           </a:p>
         </p:txBody>
       </p:sp>
@@ -3837,26 +3058,29 @@
             <a:r>
               <a:rPr lang="ja-JP" altLang="en-US" sz="1950" dirty="0">
                 <a:solidFill>
-                  <a:srgbClr val="000000"/>
+                  <a:srgbClr val="383838"/>
                 </a:solidFill>
                 <a:latin typeface="PT Serif" pitchFamily="34" charset="0"/>
                 <a:ea typeface="PT Serif" pitchFamily="34" charset="-122"/>
                 <a:cs typeface="PT Serif" pitchFamily="34" charset="-120"/>
               </a:rPr>
-              <a:t>🔥</a:t>
+              <a:t> </a:t>
             </a:r>
             <a:r>
               <a:rPr lang="ja-JP" altLang="en-US" sz="1950" dirty="0">
                 <a:solidFill>
                   <a:srgbClr val="383838"/>
                 </a:solidFill>
-                <a:latin typeface="PT Serif" pitchFamily="34" charset="0"/>
-                <a:ea typeface="PT Serif" pitchFamily="34" charset="-122"/>
+                <a:latin typeface="Meiryo UI" panose="020B0604030504040204" pitchFamily="50" charset="-128"/>
+                <a:ea typeface="Meiryo UI" panose="020B0604030504040204" pitchFamily="50" charset="-128"/>
                 <a:cs typeface="PT Serif" pitchFamily="34" charset="-120"/>
               </a:rPr>
-              <a:t> 分布の可視化</a:t>
-            </a:r>
-            <a:endParaRPr lang="ja-JP" sz="1950" dirty="0"/>
+              <a:t>分布の可視化</a:t>
+            </a:r>
+            <a:endParaRPr lang="ja-JP" sz="1950" dirty="0">
+              <a:latin typeface="Meiryo UI" panose="020B0604030504040204" pitchFamily="50" charset="-128"/>
+              <a:ea typeface="Meiryo UI" panose="020B0604030504040204" pitchFamily="50" charset="-128"/>
+            </a:endParaRPr>
           </a:p>
         </p:txBody>
       </p:sp>
@@ -3892,13 +3116,17 @@
                 <a:solidFill>
                   <a:srgbClr val="383838"/>
                 </a:solidFill>
-                <a:latin typeface="DM Sans" pitchFamily="34" charset="0"/>
-                <a:ea typeface="DM Sans" pitchFamily="34" charset="-122"/>
-                <a:cs typeface="DM Sans" pitchFamily="34" charset="-120"/>
+                <a:latin typeface="Meiryo UI" panose="020B0604030504040204" pitchFamily="50" charset="-128"/>
+                <a:ea typeface="Meiryo UI" panose="020B0604030504040204" pitchFamily="50" charset="-128"/>
+                <a:cs typeface="Malgun Gothic Semilight" panose="020B0502040204020203" pitchFamily="50" charset="-128"/>
               </a:rPr>
               <a:t>残ピンをヒートマップで表示</a:t>
             </a:r>
-            <a:endParaRPr lang="ja-JP" sz="1450" dirty="0"/>
+            <a:endParaRPr lang="ja-JP" sz="1450" dirty="0">
+              <a:latin typeface="Meiryo UI" panose="020B0604030504040204" pitchFamily="50" charset="-128"/>
+              <a:ea typeface="Meiryo UI" panose="020B0604030504040204" pitchFamily="50" charset="-128"/>
+              <a:cs typeface="Malgun Gothic Semilight" panose="020B0502040204020203" pitchFamily="50" charset="-128"/>
+            </a:endParaRPr>
           </a:p>
         </p:txBody>
       </p:sp>
@@ -3988,26 +3216,29 @@
             <a:r>
               <a:rPr lang="ja-JP" altLang="en-US" sz="1950" dirty="0">
                 <a:solidFill>
-                  <a:srgbClr val="000000"/>
+                  <a:srgbClr val="383838"/>
                 </a:solidFill>
                 <a:latin typeface="PT Serif" pitchFamily="34" charset="0"/>
                 <a:ea typeface="PT Serif" pitchFamily="34" charset="-122"/>
                 <a:cs typeface="PT Serif" pitchFamily="34" charset="-120"/>
               </a:rPr>
-              <a:t>📈</a:t>
+              <a:t> </a:t>
             </a:r>
             <a:r>
               <a:rPr lang="ja-JP" altLang="en-US" sz="1950" dirty="0">
                 <a:solidFill>
                   <a:srgbClr val="383838"/>
                 </a:solidFill>
-                <a:latin typeface="PT Serif" pitchFamily="34" charset="0"/>
-                <a:ea typeface="PT Serif" pitchFamily="34" charset="-122"/>
+                <a:latin typeface="Meiryo UI" panose="020B0604030504040204" pitchFamily="50" charset="-128"/>
+                <a:ea typeface="Meiryo UI" panose="020B0604030504040204" pitchFamily="50" charset="-128"/>
                 <a:cs typeface="PT Serif" pitchFamily="34" charset="-120"/>
               </a:rPr>
-              <a:t> 改善の軌跡</a:t>
-            </a:r>
-            <a:endParaRPr lang="ja-JP" sz="1950" dirty="0"/>
+              <a:t>改善の軌跡</a:t>
+            </a:r>
+            <a:endParaRPr lang="ja-JP" sz="1950" dirty="0">
+              <a:latin typeface="Meiryo UI" panose="020B0604030504040204" pitchFamily="50" charset="-128"/>
+              <a:ea typeface="Meiryo UI" panose="020B0604030504040204" pitchFamily="50" charset="-128"/>
+            </a:endParaRPr>
           </a:p>
         </p:txBody>
       </p:sp>
@@ -4043,13 +3274,16 @@
                 <a:solidFill>
                   <a:srgbClr val="383838"/>
                 </a:solidFill>
-                <a:latin typeface="DM Sans" pitchFamily="34" charset="0"/>
-                <a:ea typeface="DM Sans" pitchFamily="34" charset="-122"/>
+                <a:latin typeface="Meiryo UI" panose="020B0604030504040204" pitchFamily="50" charset="-128"/>
+                <a:ea typeface="Meiryo UI" panose="020B0604030504040204" pitchFamily="50" charset="-128"/>
                 <a:cs typeface="DM Sans" pitchFamily="34" charset="-120"/>
               </a:rPr>
               <a:t>履歴から成長を確認</a:t>
             </a:r>
-            <a:endParaRPr lang="ja-JP" sz="1450" dirty="0"/>
+            <a:endParaRPr lang="ja-JP" sz="1450" dirty="0">
+              <a:latin typeface="Meiryo UI" panose="020B0604030504040204" pitchFamily="50" charset="-128"/>
+              <a:ea typeface="Meiryo UI" panose="020B0604030504040204" pitchFamily="50" charset="-128"/>
+            </a:endParaRPr>
           </a:p>
         </p:txBody>
       </p:sp>
@@ -4110,13 +3344,16 @@
                 <a:solidFill>
                   <a:srgbClr val="020202"/>
                 </a:solidFill>
-                <a:latin typeface="PT Serif" pitchFamily="34" charset="0"/>
-                <a:ea typeface="PT Serif" pitchFamily="34" charset="-122"/>
+                <a:latin typeface="Meiryo UI" panose="020B0604030504040204" pitchFamily="50" charset="-128"/>
+                <a:ea typeface="Meiryo UI" panose="020B0604030504040204" pitchFamily="50" charset="-128"/>
                 <a:cs typeface="PT Serif" pitchFamily="34" charset="-120"/>
               </a:rPr>
               <a:t>AIコーチ機能</a:t>
             </a:r>
-            <a:endParaRPr lang="ja-JP" sz="3300" dirty="0"/>
+            <a:endParaRPr lang="ja-JP" sz="3300" dirty="0">
+              <a:latin typeface="Meiryo UI" panose="020B0604030504040204" pitchFamily="50" charset="-128"/>
+              <a:ea typeface="Meiryo UI" panose="020B0604030504040204" pitchFamily="50" charset="-128"/>
+            </a:endParaRPr>
           </a:p>
         </p:txBody>
       </p:sp>
@@ -4154,8 +3391,8 @@
                 <a:solidFill>
                   <a:srgbClr val="020202"/>
                 </a:solidFill>
-                <a:latin typeface="PT Serif" pitchFamily="34" charset="0"/>
-                <a:ea typeface="PT Serif" pitchFamily="34" charset="-122"/>
+                <a:latin typeface="Meiryo UI" panose="020B0604030504040204" pitchFamily="50" charset="-128"/>
+                <a:ea typeface="Meiryo UI" panose="020B0604030504040204" pitchFamily="50" charset="-128"/>
                 <a:cs typeface="PT Serif" pitchFamily="34" charset="-120"/>
               </a:rPr>
               <a:t>投球データから、</a:t>
@@ -4165,13 +3402,16 @@
                 <a:solidFill>
                   <a:srgbClr val="E04F00"/>
                 </a:solidFill>
-                <a:latin typeface="PT Serif" pitchFamily="34" charset="0"/>
-                <a:ea typeface="PT Serif" pitchFamily="34" charset="-122"/>
+                <a:latin typeface="Meiryo UI" panose="020B0604030504040204" pitchFamily="50" charset="-128"/>
+                <a:ea typeface="Meiryo UI" panose="020B0604030504040204" pitchFamily="50" charset="-128"/>
                 <a:cs typeface="PT Serif" pitchFamily="34" charset="-120"/>
               </a:rPr>
               <a:t>即時に改善アドバイス</a:t>
             </a:r>
-            <a:endParaRPr lang="ja-JP" sz="1650" dirty="0"/>
+            <a:endParaRPr lang="ja-JP" sz="1650" dirty="0">
+              <a:latin typeface="Meiryo UI" panose="020B0604030504040204" pitchFamily="50" charset="-128"/>
+              <a:ea typeface="Meiryo UI" panose="020B0604030504040204" pitchFamily="50" charset="-128"/>
+            </a:endParaRPr>
           </a:p>
         </p:txBody>
       </p:sp>
@@ -4209,13 +3449,16 @@
                 <a:solidFill>
                   <a:srgbClr val="383838"/>
                 </a:solidFill>
-                <a:latin typeface="DM Sans" pitchFamily="34" charset="0"/>
-                <a:ea typeface="DM Sans" pitchFamily="34" charset="-122"/>
+                <a:latin typeface="Meiryo UI" panose="020B0604030504040204" pitchFamily="50" charset="-128"/>
+                <a:ea typeface="Meiryo UI" panose="020B0604030504040204" pitchFamily="50" charset="-128"/>
                 <a:cs typeface="DM Sans" pitchFamily="34" charset="-120"/>
               </a:rPr>
               <a:t>AIがあなたの投球パターンを分析し、具体的で実行しやすいアクションを提案します。</a:t>
             </a:r>
-            <a:endParaRPr lang="ja-JP" sz="1250" dirty="0"/>
+            <a:endParaRPr lang="ja-JP" sz="1250" dirty="0">
+              <a:latin typeface="Meiryo UI" panose="020B0604030504040204" pitchFamily="50" charset="-128"/>
+              <a:ea typeface="Meiryo UI" panose="020B0604030504040204" pitchFamily="50" charset="-128"/>
+            </a:endParaRPr>
           </a:p>
         </p:txBody>
       </p:sp>
@@ -4279,26 +3522,29 @@
             <a:r>
               <a:rPr lang="ja-JP" altLang="en-US" sz="1650" dirty="0">
                 <a:solidFill>
-                  <a:srgbClr val="000000"/>
+                  <a:srgbClr val="383838"/>
                 </a:solidFill>
                 <a:latin typeface="PT Serif" pitchFamily="34" charset="0"/>
                 <a:ea typeface="PT Serif" pitchFamily="34" charset="-122"/>
                 <a:cs typeface="PT Serif" pitchFamily="34" charset="-120"/>
               </a:rPr>
-              <a:t>🎤</a:t>
+              <a:t> </a:t>
             </a:r>
             <a:r>
               <a:rPr lang="ja-JP" altLang="en-US" sz="1650" dirty="0">
                 <a:solidFill>
                   <a:srgbClr val="383838"/>
                 </a:solidFill>
-                <a:latin typeface="PT Serif" pitchFamily="34" charset="0"/>
-                <a:ea typeface="PT Serif" pitchFamily="34" charset="-122"/>
+                <a:latin typeface="Meiryo UI" panose="020B0604030504040204" pitchFamily="50" charset="-128"/>
+                <a:ea typeface="Meiryo UI" panose="020B0604030504040204" pitchFamily="50" charset="-128"/>
                 <a:cs typeface="PT Serif" pitchFamily="34" charset="-120"/>
               </a:rPr>
-              <a:t> 音声・テキスト対応</a:t>
-            </a:r>
-            <a:endParaRPr lang="ja-JP" sz="1650" dirty="0"/>
+              <a:t>音声・テキスト対応</a:t>
+            </a:r>
+            <a:endParaRPr lang="ja-JP" sz="1650" dirty="0">
+              <a:latin typeface="Meiryo UI" panose="020B0604030504040204" pitchFamily="50" charset="-128"/>
+              <a:ea typeface="Meiryo UI" panose="020B0604030504040204" pitchFamily="50" charset="-128"/>
+            </a:endParaRPr>
           </a:p>
         </p:txBody>
       </p:sp>
@@ -4334,13 +3580,16 @@
                 <a:solidFill>
                   <a:srgbClr val="383838"/>
                 </a:solidFill>
-                <a:latin typeface="DM Sans" pitchFamily="34" charset="0"/>
-                <a:ea typeface="DM Sans" pitchFamily="34" charset="-122"/>
+                <a:latin typeface="Meiryo UI" panose="020B0604030504040204" pitchFamily="50" charset="-128"/>
+                <a:ea typeface="Meiryo UI" panose="020B0604030504040204" pitchFamily="50" charset="-128"/>
                 <a:cs typeface="DM Sans" pitchFamily="34" charset="-120"/>
               </a:rPr>
               <a:t>プレイ中もすぐ確認できる形式</a:t>
             </a:r>
-            <a:endParaRPr lang="ja-JP" sz="1250" dirty="0"/>
+            <a:endParaRPr lang="ja-JP" sz="1250" dirty="0">
+              <a:latin typeface="Meiryo UI" panose="020B0604030504040204" pitchFamily="50" charset="-128"/>
+              <a:ea typeface="Meiryo UI" panose="020B0604030504040204" pitchFamily="50" charset="-128"/>
+            </a:endParaRPr>
           </a:p>
         </p:txBody>
       </p:sp>
@@ -4404,26 +3653,29 @@
             <a:r>
               <a:rPr lang="zh-CN" altLang="en-US" sz="1650" dirty="0">
                 <a:solidFill>
-                  <a:srgbClr val="000000"/>
+                  <a:srgbClr val="383838"/>
                 </a:solidFill>
                 <a:latin typeface="PT Serif" pitchFamily="34" charset="0"/>
                 <a:ea typeface="PT Serif" pitchFamily="34" charset="-122"/>
                 <a:cs typeface="PT Serif" pitchFamily="34" charset="-120"/>
               </a:rPr>
-              <a:t>🎯</a:t>
+              <a:t> </a:t>
             </a:r>
             <a:r>
               <a:rPr lang="zh-CN" altLang="en-US" sz="1650" dirty="0">
                 <a:solidFill>
                   <a:srgbClr val="383838"/>
                 </a:solidFill>
-                <a:latin typeface="PT Serif" pitchFamily="34" charset="0"/>
-                <a:ea typeface="PT Serif" pitchFamily="34" charset="-122"/>
+                <a:latin typeface="Meiryo UI" panose="020B0604030504040204" pitchFamily="50" charset="-128"/>
+                <a:ea typeface="Meiryo UI" panose="020B0604030504040204" pitchFamily="50" charset="-128"/>
                 <a:cs typeface="PT Serif" pitchFamily="34" charset="-120"/>
               </a:rPr>
-              <a:t> 個別最適化</a:t>
-            </a:r>
-            <a:endParaRPr lang="zh-CN" sz="1650" dirty="0"/>
+              <a:t>個別最適化</a:t>
+            </a:r>
+            <a:endParaRPr lang="zh-CN" sz="1650" dirty="0">
+              <a:latin typeface="Meiryo UI" panose="020B0604030504040204" pitchFamily="50" charset="-128"/>
+              <a:ea typeface="Meiryo UI" panose="020B0604030504040204" pitchFamily="50" charset="-128"/>
+            </a:endParaRPr>
           </a:p>
         </p:txBody>
       </p:sp>
@@ -4459,13 +3711,16 @@
                 <a:solidFill>
                   <a:srgbClr val="383838"/>
                 </a:solidFill>
-                <a:latin typeface="DM Sans" pitchFamily="34" charset="0"/>
-                <a:ea typeface="DM Sans" pitchFamily="34" charset="-122"/>
+                <a:latin typeface="Meiryo UI" panose="020B0604030504040204" pitchFamily="50" charset="-128"/>
+                <a:ea typeface="Meiryo UI" panose="020B0604030504040204" pitchFamily="50" charset="-128"/>
                 <a:cs typeface="DM Sans" pitchFamily="34" charset="-120"/>
               </a:rPr>
               <a:t>あなたの履歴に基づいた提案</a:t>
             </a:r>
-            <a:endParaRPr lang="ja-JP" sz="1250" dirty="0"/>
+            <a:endParaRPr lang="ja-JP" sz="1250" dirty="0">
+              <a:latin typeface="Meiryo UI" panose="020B0604030504040204" pitchFamily="50" charset="-128"/>
+              <a:ea typeface="Meiryo UI" panose="020B0604030504040204" pitchFamily="50" charset="-128"/>
+            </a:endParaRPr>
           </a:p>
         </p:txBody>
       </p:sp>
@@ -4529,26 +3784,29 @@
             <a:r>
               <a:rPr lang="ja-JP" altLang="en-US" sz="1650" dirty="0">
                 <a:solidFill>
-                  <a:srgbClr val="000000"/>
+                  <a:srgbClr val="383838"/>
                 </a:solidFill>
                 <a:latin typeface="PT Serif" pitchFamily="34" charset="0"/>
                 <a:ea typeface="PT Serif" pitchFamily="34" charset="-122"/>
                 <a:cs typeface="PT Serif" pitchFamily="34" charset="-120"/>
               </a:rPr>
-              <a:t>📋</a:t>
+              <a:t> </a:t>
             </a:r>
             <a:r>
               <a:rPr lang="ja-JP" altLang="en-US" sz="1650" dirty="0">
                 <a:solidFill>
                   <a:srgbClr val="383838"/>
                 </a:solidFill>
-                <a:latin typeface="PT Serif" pitchFamily="34" charset="0"/>
-                <a:ea typeface="PT Serif" pitchFamily="34" charset="-122"/>
+                <a:latin typeface="Meiryo UI" panose="020B0604030504040204" pitchFamily="50" charset="-128"/>
+                <a:ea typeface="Meiryo UI" panose="020B0604030504040204" pitchFamily="50" charset="-128"/>
                 <a:cs typeface="PT Serif" pitchFamily="34" charset="-120"/>
               </a:rPr>
-              <a:t> 改善トラック</a:t>
-            </a:r>
-            <a:endParaRPr lang="ja-JP" sz="1650" dirty="0"/>
+              <a:t>改善トラック</a:t>
+            </a:r>
+            <a:endParaRPr lang="ja-JP" sz="1650" dirty="0">
+              <a:latin typeface="Meiryo UI" panose="020B0604030504040204" pitchFamily="50" charset="-128"/>
+              <a:ea typeface="Meiryo UI" panose="020B0604030504040204" pitchFamily="50" charset="-128"/>
+            </a:endParaRPr>
           </a:p>
         </p:txBody>
       </p:sp>
@@ -4584,13 +3842,16 @@
                 <a:solidFill>
                   <a:srgbClr val="383838"/>
                 </a:solidFill>
-                <a:latin typeface="DM Sans" pitchFamily="34" charset="0"/>
-                <a:ea typeface="DM Sans" pitchFamily="34" charset="-122"/>
+                <a:latin typeface="Meiryo UI" panose="020B0604030504040204" pitchFamily="50" charset="-128"/>
+                <a:ea typeface="Meiryo UI" panose="020B0604030504040204" pitchFamily="50" charset="-128"/>
                 <a:cs typeface="DM Sans" pitchFamily="34" charset="-120"/>
               </a:rPr>
               <a:t>継続的な成長をサポート</a:t>
             </a:r>
-            <a:endParaRPr lang="ja-JP" sz="1250" dirty="0"/>
+            <a:endParaRPr lang="ja-JP" sz="1250" dirty="0">
+              <a:latin typeface="Meiryo UI" panose="020B0604030504040204" pitchFamily="50" charset="-128"/>
+              <a:ea typeface="Meiryo UI" panose="020B0604030504040204" pitchFamily="50" charset="-128"/>
+            </a:endParaRPr>
           </a:p>
         </p:txBody>
       </p:sp>
@@ -4610,7 +3871,7 @@
         </p:blipFill>
         <p:spPr>
           <a:xfrm>
-            <a:off x="4608993" y="2842419"/>
+            <a:off x="9274126" y="2662237"/>
             <a:ext cx="1904952" cy="1905000"/>
           </a:xfrm>
           <a:prstGeom prst="rect">
@@ -4675,13 +3936,16 @@
                 <a:solidFill>
                   <a:srgbClr val="020202"/>
                 </a:solidFill>
-                <a:latin typeface="PT Serif" pitchFamily="34" charset="0"/>
-                <a:ea typeface="PT Serif" pitchFamily="34" charset="-122"/>
+                <a:latin typeface="Meiryo UI" panose="020B0604030504040204" pitchFamily="50" charset="-128"/>
+                <a:ea typeface="Meiryo UI" panose="020B0604030504040204" pitchFamily="50" charset="-128"/>
                 <a:cs typeface="PT Serif" pitchFamily="34" charset="-120"/>
               </a:rPr>
               <a:t>主要機能ラインナップ</a:t>
             </a:r>
-            <a:endParaRPr lang="ja-JP" sz="3900" dirty="0"/>
+            <a:endParaRPr lang="ja-JP" sz="3900" dirty="0">
+              <a:latin typeface="Meiryo UI" panose="020B0604030504040204" pitchFamily="50" charset="-128"/>
+              <a:ea typeface="Meiryo UI" panose="020B0604030504040204" pitchFamily="50" charset="-128"/>
+            </a:endParaRPr>
           </a:p>
         </p:txBody>
       </p:sp>
@@ -4741,13 +4005,16 @@
                 <a:solidFill>
                   <a:srgbClr val="383838"/>
                 </a:solidFill>
-                <a:latin typeface="PT Serif" pitchFamily="34" charset="0"/>
-                <a:ea typeface="PT Serif" pitchFamily="34" charset="-122"/>
+                <a:latin typeface="Meiryo UI" panose="020B0604030504040204" pitchFamily="50" charset="-128"/>
+                <a:ea typeface="Meiryo UI" panose="020B0604030504040204" pitchFamily="50" charset="-128"/>
                 <a:cs typeface="PT Serif" pitchFamily="34" charset="-120"/>
               </a:rPr>
               <a:t>スコア入力</a:t>
             </a:r>
-            <a:endParaRPr lang="ja-JP" sz="1950" dirty="0"/>
+            <a:endParaRPr lang="ja-JP" sz="1950" dirty="0">
+              <a:latin typeface="Meiryo UI" panose="020B0604030504040204" pitchFamily="50" charset="-128"/>
+              <a:ea typeface="Meiryo UI" panose="020B0604030504040204" pitchFamily="50" charset="-128"/>
+            </a:endParaRPr>
           </a:p>
         </p:txBody>
       </p:sp>
@@ -4785,13 +4052,16 @@
                 <a:solidFill>
                   <a:srgbClr val="383838"/>
                 </a:solidFill>
-                <a:latin typeface="DM Sans" pitchFamily="34" charset="0"/>
-                <a:ea typeface="DM Sans" pitchFamily="34" charset="-122"/>
+                <a:latin typeface="Meiryo UI" panose="020B0604030504040204" pitchFamily="50" charset="-128"/>
+                <a:ea typeface="Meiryo UI" panose="020B0604030504040204" pitchFamily="50" charset="-128"/>
                 <a:cs typeface="DM Sans" pitchFamily="34" charset="-120"/>
               </a:rPr>
               <a:t>ボタン・キーボード対応、Enterで即時保存</a:t>
             </a:r>
-            <a:endParaRPr lang="ja-JP" sz="1450" dirty="0"/>
+            <a:endParaRPr lang="ja-JP" sz="1450" dirty="0">
+              <a:latin typeface="Meiryo UI" panose="020B0604030504040204" pitchFamily="50" charset="-128"/>
+              <a:ea typeface="Meiryo UI" panose="020B0604030504040204" pitchFamily="50" charset="-128"/>
+            </a:endParaRPr>
           </a:p>
         </p:txBody>
       </p:sp>
@@ -4853,13 +4123,16 @@
                 <a:solidFill>
                   <a:srgbClr val="383838"/>
                 </a:solidFill>
-                <a:latin typeface="PT Serif" pitchFamily="34" charset="0"/>
-                <a:ea typeface="PT Serif" pitchFamily="34" charset="-122"/>
+                <a:latin typeface="Meiryo UI" panose="020B0604030504040204" pitchFamily="50" charset="-128"/>
+                <a:ea typeface="Meiryo UI" panose="020B0604030504040204" pitchFamily="50" charset="-128"/>
                 <a:cs typeface="PT Serif" pitchFamily="34" charset="-120"/>
               </a:rPr>
               <a:t>LaneHeatmap ウィジェット</a:t>
             </a:r>
-            <a:endParaRPr lang="ja-JP" sz="1950" dirty="0"/>
+            <a:endParaRPr lang="ja-JP" sz="1950" dirty="0">
+              <a:latin typeface="Meiryo UI" panose="020B0604030504040204" pitchFamily="50" charset="-128"/>
+              <a:ea typeface="Meiryo UI" panose="020B0604030504040204" pitchFamily="50" charset="-128"/>
+            </a:endParaRPr>
           </a:p>
         </p:txBody>
       </p:sp>
@@ -4897,13 +4170,16 @@
                 <a:solidFill>
                   <a:srgbClr val="383838"/>
                 </a:solidFill>
-                <a:latin typeface="DM Sans" pitchFamily="34" charset="0"/>
-                <a:ea typeface="DM Sans" pitchFamily="34" charset="-122"/>
+                <a:latin typeface="Meiryo UI" panose="020B0604030504040204" pitchFamily="50" charset="-128"/>
+                <a:ea typeface="Meiryo UI" panose="020B0604030504040204" pitchFamily="50" charset="-128"/>
                 <a:cs typeface="DM Sans" pitchFamily="34" charset="-120"/>
               </a:rPr>
               <a:t>レーン別・残ピン分布をグラフィカルに表示</a:t>
             </a:r>
-            <a:endParaRPr lang="ja-JP" sz="1450" dirty="0"/>
+            <a:endParaRPr lang="ja-JP" sz="1450" dirty="0">
+              <a:latin typeface="Meiryo UI" panose="020B0604030504040204" pitchFamily="50" charset="-128"/>
+              <a:ea typeface="Meiryo UI" panose="020B0604030504040204" pitchFamily="50" charset="-128"/>
+            </a:endParaRPr>
           </a:p>
         </p:txBody>
       </p:sp>
@@ -4963,13 +4239,16 @@
                 <a:solidFill>
                   <a:srgbClr val="383838"/>
                 </a:solidFill>
-                <a:latin typeface="PT Serif" pitchFamily="34" charset="0"/>
-                <a:ea typeface="PT Serif" pitchFamily="34" charset="-122"/>
+                <a:latin typeface="Meiryo UI" panose="020B0604030504040204" pitchFamily="50" charset="-128"/>
+                <a:ea typeface="Meiryo UI" panose="020B0604030504040204" pitchFamily="50" charset="-128"/>
                 <a:cs typeface="PT Serif" pitchFamily="34" charset="-120"/>
               </a:rPr>
               <a:t>AIコーチ</a:t>
             </a:r>
-            <a:endParaRPr lang="ja-JP" sz="1950" dirty="0"/>
+            <a:endParaRPr lang="ja-JP" sz="1950" dirty="0">
+              <a:latin typeface="Meiryo UI" panose="020B0604030504040204" pitchFamily="50" charset="-128"/>
+              <a:ea typeface="Meiryo UI" panose="020B0604030504040204" pitchFamily="50" charset="-128"/>
+            </a:endParaRPr>
           </a:p>
         </p:txBody>
       </p:sp>
@@ -5007,40 +4286,19 @@
                 <a:solidFill>
                   <a:srgbClr val="383838"/>
                 </a:solidFill>
-                <a:latin typeface="DM Sans" pitchFamily="34" charset="0"/>
-                <a:ea typeface="DM Sans" pitchFamily="34" charset="-122"/>
+                <a:latin typeface="Meiryo UI" panose="020B0604030504040204" pitchFamily="50" charset="-128"/>
+                <a:ea typeface="Meiryo UI" panose="020B0604030504040204" pitchFamily="50" charset="-128"/>
                 <a:cs typeface="DM Sans" pitchFamily="34" charset="-120"/>
               </a:rPr>
               <a:t>短いアクション提案と改善トラックを提供</a:t>
             </a:r>
-            <a:endParaRPr lang="ja-JP" sz="1450" dirty="0"/>
-          </a:p>
-        </p:txBody>
-      </p:sp>
-      <p:pic>
-        <p:nvPicPr>
-          <p:cNvPr id="12" name="Image 3" descr="preencoded.png"/>
-          <p:cNvPicPr>
-            <a:picLocks noChangeAspect="1"/>
-          </p:cNvPicPr>
-          <p:nvPr/>
-        </p:nvPicPr>
-        <p:blipFill>
-          <a:blip r:embed="rId6"/>
-          <a:stretch>
-            <a:fillRect/>
-          </a:stretch>
-        </p:blipFill>
-        <p:spPr>
-          <a:xfrm>
-            <a:off x="8990184" y="2404170"/>
-            <a:ext cx="1473163" cy="1473200"/>
-          </a:xfrm>
-          <a:prstGeom prst="rect">
-            <a:avLst/>
-          </a:prstGeom>
-        </p:spPr>
-      </p:pic>
+            <a:endParaRPr lang="ja-JP" sz="1450" dirty="0">
+              <a:latin typeface="Meiryo UI" panose="020B0604030504040204" pitchFamily="50" charset="-128"/>
+              <a:ea typeface="Meiryo UI" panose="020B0604030504040204" pitchFamily="50" charset="-128"/>
+            </a:endParaRPr>
+          </a:p>
+        </p:txBody>
+      </p:sp>
       <p:sp>
         <p:nvSpPr>
           <p:cNvPr id="13" name="Text 7"/>
@@ -5068,17 +4326,6 @@
               </a:lnSpc>
               <a:buNone/>
             </a:pPr>
-            <a:r>
-              <a:rPr lang="en-US" sz="1950" dirty="0">
-                <a:solidFill>
-                  <a:srgbClr val="383838"/>
-                </a:solidFill>
-                <a:latin typeface="PT Serif" pitchFamily="34" charset="0"/>
-                <a:ea typeface="PT Serif" pitchFamily="34" charset="-122"/>
-                <a:cs typeface="PT Serif" pitchFamily="34" charset="-120"/>
-              </a:rPr>
-              <a:t>CloudSyncService</a:t>
-            </a:r>
             <a:endParaRPr lang="en-US" sz="1950" dirty="0"/>
           </a:p>
         </p:txBody>
@@ -5112,17 +4359,6 @@
               </a:lnSpc>
               <a:buNone/>
             </a:pPr>
-            <a:r>
-              <a:rPr lang="ja-JP" altLang="en-US" sz="1450" dirty="0">
-                <a:solidFill>
-                  <a:srgbClr val="383838"/>
-                </a:solidFill>
-                <a:latin typeface="DM Sans" pitchFamily="34" charset="0"/>
-                <a:ea typeface="DM Sans" pitchFamily="34" charset="-122"/>
-                <a:cs typeface="DM Sans" pitchFamily="34" charset="-120"/>
-              </a:rPr>
-              <a:t>Firestoreへの同期オプションで複数端末対応</a:t>
-            </a:r>
             <a:endParaRPr lang="ja-JP" sz="1450" dirty="0"/>
           </a:p>
         </p:txBody>
@@ -5208,13 +4444,16 @@
                 <a:solidFill>
                   <a:srgbClr val="020202"/>
                 </a:solidFill>
-                <a:latin typeface="PT Serif" pitchFamily="34" charset="0"/>
-                <a:ea typeface="PT Serif" pitchFamily="34" charset="-122"/>
+                <a:latin typeface="Meiryo UI" panose="020B0604030504040204" pitchFamily="50" charset="-128"/>
+                <a:ea typeface="Meiryo UI" panose="020B0604030504040204" pitchFamily="50" charset="-128"/>
                 <a:cs typeface="PT Serif" pitchFamily="34" charset="-120"/>
               </a:rPr>
               <a:t>ボウリング場への価値</a:t>
             </a:r>
-            <a:endParaRPr lang="ja-JP" sz="3900" dirty="0"/>
+            <a:endParaRPr lang="ja-JP" sz="3900" dirty="0">
+              <a:latin typeface="Meiryo UI" panose="020B0604030504040204" pitchFamily="50" charset="-128"/>
+              <a:ea typeface="Meiryo UI" panose="020B0604030504040204" pitchFamily="50" charset="-128"/>
+            </a:endParaRPr>
           </a:p>
         </p:txBody>
       </p:sp>
@@ -5250,13 +4489,16 @@
                 <a:solidFill>
                   <a:srgbClr val="383838"/>
                 </a:solidFill>
-                <a:latin typeface="PT Serif" pitchFamily="34" charset="0"/>
-                <a:ea typeface="PT Serif" pitchFamily="34" charset="-122"/>
+                <a:latin typeface="Meiryo UI" panose="020B0604030504040204" pitchFamily="50" charset="-128"/>
+                <a:ea typeface="Meiryo UI" panose="020B0604030504040204" pitchFamily="50" charset="-128"/>
                 <a:cs typeface="PT Serif" pitchFamily="34" charset="-120"/>
               </a:rPr>
               <a:t>↑</a:t>
             </a:r>
-            <a:endParaRPr lang="en-US" sz="4900" dirty="0"/>
+            <a:endParaRPr lang="en-US" sz="4900" dirty="0">
+              <a:latin typeface="Meiryo UI" panose="020B0604030504040204" pitchFamily="50" charset="-128"/>
+              <a:ea typeface="Meiryo UI" panose="020B0604030504040204" pitchFamily="50" charset="-128"/>
+            </a:endParaRPr>
           </a:p>
         </p:txBody>
       </p:sp>
@@ -5292,13 +4534,16 @@
                 <a:solidFill>
                   <a:srgbClr val="383838"/>
                 </a:solidFill>
-                <a:latin typeface="PT Serif" pitchFamily="34" charset="0"/>
-                <a:ea typeface="PT Serif" pitchFamily="34" charset="-122"/>
+                <a:latin typeface="Meiryo UI" panose="020B0604030504040204" pitchFamily="50" charset="-128"/>
+                <a:ea typeface="Meiryo UI" panose="020B0604030504040204" pitchFamily="50" charset="-128"/>
                 <a:cs typeface="PT Serif" pitchFamily="34" charset="-120"/>
               </a:rPr>
               <a:t>来店者満足度</a:t>
             </a:r>
-            <a:endParaRPr lang="zh-CN" sz="1950" dirty="0"/>
+            <a:endParaRPr lang="zh-CN" sz="1950" dirty="0">
+              <a:latin typeface="Meiryo UI" panose="020B0604030504040204" pitchFamily="50" charset="-128"/>
+              <a:ea typeface="Meiryo UI" panose="020B0604030504040204" pitchFamily="50" charset="-128"/>
+            </a:endParaRPr>
           </a:p>
         </p:txBody>
       </p:sp>
@@ -5334,13 +4579,16 @@
                 <a:solidFill>
                   <a:srgbClr val="383838"/>
                 </a:solidFill>
-                <a:latin typeface="DM Sans" pitchFamily="34" charset="0"/>
-                <a:ea typeface="DM Sans" pitchFamily="34" charset="-122"/>
+                <a:latin typeface="Meiryo UI" panose="020B0604030504040204" pitchFamily="50" charset="-128"/>
+                <a:ea typeface="Meiryo UI" panose="020B0604030504040204" pitchFamily="50" charset="-128"/>
                 <a:cs typeface="DM Sans" pitchFamily="34" charset="-120"/>
               </a:rPr>
               <a:t>データ活用による体験向上</a:t>
             </a:r>
-            <a:endParaRPr lang="ja-JP" sz="1450" dirty="0"/>
+            <a:endParaRPr lang="ja-JP" sz="1450" dirty="0">
+              <a:latin typeface="Meiryo UI" panose="020B0604030504040204" pitchFamily="50" charset="-128"/>
+              <a:ea typeface="Meiryo UI" panose="020B0604030504040204" pitchFamily="50" charset="-128"/>
+            </a:endParaRPr>
           </a:p>
         </p:txBody>
       </p:sp>
@@ -5376,13 +4624,16 @@
                 <a:solidFill>
                   <a:srgbClr val="383838"/>
                 </a:solidFill>
-                <a:latin typeface="PT Serif" pitchFamily="34" charset="0"/>
-                <a:ea typeface="PT Serif" pitchFamily="34" charset="-122"/>
+                <a:latin typeface="Meiryo UI" panose="020B0604030504040204" pitchFamily="50" charset="-128"/>
+                <a:ea typeface="Meiryo UI" panose="020B0604030504040204" pitchFamily="50" charset="-128"/>
                 <a:cs typeface="PT Serif" pitchFamily="34" charset="-120"/>
               </a:rPr>
               <a:t>↑</a:t>
             </a:r>
-            <a:endParaRPr lang="en-US" sz="4900" dirty="0"/>
+            <a:endParaRPr lang="en-US" sz="4900" dirty="0">
+              <a:latin typeface="Meiryo UI" panose="020B0604030504040204" pitchFamily="50" charset="-128"/>
+              <a:ea typeface="Meiryo UI" panose="020B0604030504040204" pitchFamily="50" charset="-128"/>
+            </a:endParaRPr>
           </a:p>
         </p:txBody>
       </p:sp>
@@ -5418,13 +4669,16 @@
                 <a:solidFill>
                   <a:srgbClr val="383838"/>
                 </a:solidFill>
-                <a:latin typeface="PT Serif" pitchFamily="34" charset="0"/>
-                <a:ea typeface="PT Serif" pitchFamily="34" charset="-122"/>
+                <a:latin typeface="Meiryo UI" panose="020B0604030504040204" pitchFamily="50" charset="-128"/>
+                <a:ea typeface="Meiryo UI" panose="020B0604030504040204" pitchFamily="50" charset="-128"/>
                 <a:cs typeface="PT Serif" pitchFamily="34" charset="-120"/>
               </a:rPr>
               <a:t>リピート率</a:t>
             </a:r>
-            <a:endParaRPr lang="ja-JP" sz="1950" dirty="0"/>
+            <a:endParaRPr lang="ja-JP" sz="1950" dirty="0">
+              <a:latin typeface="Meiryo UI" panose="020B0604030504040204" pitchFamily="50" charset="-128"/>
+              <a:ea typeface="Meiryo UI" panose="020B0604030504040204" pitchFamily="50" charset="-128"/>
+            </a:endParaRPr>
           </a:p>
         </p:txBody>
       </p:sp>
@@ -5460,13 +4714,16 @@
                 <a:solidFill>
                   <a:srgbClr val="383838"/>
                 </a:solidFill>
-                <a:latin typeface="DM Sans" pitchFamily="34" charset="0"/>
-                <a:ea typeface="DM Sans" pitchFamily="34" charset="-122"/>
+                <a:latin typeface="Meiryo UI" panose="020B0604030504040204" pitchFamily="50" charset="-128"/>
+                <a:ea typeface="Meiryo UI" panose="020B0604030504040204" pitchFamily="50" charset="-128"/>
                 <a:cs typeface="DM Sans" pitchFamily="34" charset="-120"/>
               </a:rPr>
               <a:t>継続的な改善体験で再来を促進</a:t>
             </a:r>
-            <a:endParaRPr lang="ja-JP" sz="1450" dirty="0"/>
+            <a:endParaRPr lang="ja-JP" sz="1450" dirty="0">
+              <a:latin typeface="Meiryo UI" panose="020B0604030504040204" pitchFamily="50" charset="-128"/>
+              <a:ea typeface="Meiryo UI" panose="020B0604030504040204" pitchFamily="50" charset="-128"/>
+            </a:endParaRPr>
           </a:p>
         </p:txBody>
       </p:sp>
@@ -5502,13 +4759,16 @@
                 <a:solidFill>
                   <a:srgbClr val="383838"/>
                 </a:solidFill>
-                <a:latin typeface="PT Serif" pitchFamily="34" charset="0"/>
-                <a:ea typeface="PT Serif" pitchFamily="34" charset="-122"/>
+                <a:latin typeface="Meiryo UI" panose="020B0604030504040204" pitchFamily="50" charset="-128"/>
+                <a:ea typeface="Meiryo UI" panose="020B0604030504040204" pitchFamily="50" charset="-128"/>
                 <a:cs typeface="PT Serif" pitchFamily="34" charset="-120"/>
               </a:rPr>
               <a:t>0</a:t>
             </a:r>
-            <a:endParaRPr lang="en-US" sz="4900" dirty="0"/>
+            <a:endParaRPr lang="en-US" sz="4900" dirty="0">
+              <a:latin typeface="Meiryo UI" panose="020B0604030504040204" pitchFamily="50" charset="-128"/>
+              <a:ea typeface="Meiryo UI" panose="020B0604030504040204" pitchFamily="50" charset="-128"/>
+            </a:endParaRPr>
           </a:p>
         </p:txBody>
       </p:sp>
@@ -5544,13 +4804,16 @@
                 <a:solidFill>
                   <a:srgbClr val="383838"/>
                 </a:solidFill>
-                <a:latin typeface="PT Serif" pitchFamily="34" charset="0"/>
-                <a:ea typeface="PT Serif" pitchFamily="34" charset="-122"/>
+                <a:latin typeface="Meiryo UI" panose="020B0604030504040204" pitchFamily="50" charset="-128"/>
+                <a:ea typeface="Meiryo UI" panose="020B0604030504040204" pitchFamily="50" charset="-128"/>
                 <a:cs typeface="PT Serif" pitchFamily="34" charset="-120"/>
               </a:rPr>
               <a:t>追加コスト</a:t>
             </a:r>
-            <a:endParaRPr lang="ja-JP" sz="1950" dirty="0"/>
+            <a:endParaRPr lang="ja-JP" sz="1950" dirty="0">
+              <a:latin typeface="Meiryo UI" panose="020B0604030504040204" pitchFamily="50" charset="-128"/>
+              <a:ea typeface="Meiryo UI" panose="020B0604030504040204" pitchFamily="50" charset="-128"/>
+            </a:endParaRPr>
           </a:p>
         </p:txBody>
       </p:sp>
@@ -5586,13 +4849,16 @@
                 <a:solidFill>
                   <a:srgbClr val="383838"/>
                 </a:solidFill>
-                <a:latin typeface="DM Sans" pitchFamily="34" charset="0"/>
-                <a:ea typeface="DM Sans" pitchFamily="34" charset="-122"/>
+                <a:latin typeface="Meiryo UI" panose="020B0604030504040204" pitchFamily="50" charset="-128"/>
+                <a:ea typeface="Meiryo UI" panose="020B0604030504040204" pitchFamily="50" charset="-128"/>
                 <a:cs typeface="DM Sans" pitchFamily="34" charset="-120"/>
               </a:rPr>
               <a:t>既存のスコア運用をデジタル化</a:t>
             </a:r>
-            <a:endParaRPr lang="ja-JP" sz="1450" dirty="0"/>
+            <a:endParaRPr lang="ja-JP" sz="1450" dirty="0">
+              <a:latin typeface="Meiryo UI" panose="020B0604030504040204" pitchFamily="50" charset="-128"/>
+              <a:ea typeface="Meiryo UI" panose="020B0604030504040204" pitchFamily="50" charset="-128"/>
+            </a:endParaRPr>
           </a:p>
         </p:txBody>
       </p:sp>
@@ -5653,13 +4919,16 @@
                 <a:solidFill>
                   <a:srgbClr val="020202"/>
                 </a:solidFill>
-                <a:latin typeface="PT Serif" pitchFamily="34" charset="0"/>
-                <a:ea typeface="PT Serif" pitchFamily="34" charset="-122"/>
+                <a:latin typeface="Meiryo UI" panose="020B0604030504040204" pitchFamily="50" charset="-128"/>
+                <a:ea typeface="Meiryo UI" panose="020B0604030504040204" pitchFamily="50" charset="-128"/>
                 <a:cs typeface="PT Serif" pitchFamily="34" charset="-120"/>
               </a:rPr>
               <a:t>プレイヤーへの価値</a:t>
             </a:r>
-            <a:endParaRPr lang="ja-JP" sz="3450" dirty="0"/>
+            <a:endParaRPr lang="ja-JP" sz="3450" dirty="0">
+              <a:latin typeface="Meiryo UI" panose="020B0604030504040204" pitchFamily="50" charset="-128"/>
+              <a:ea typeface="Meiryo UI" panose="020B0604030504040204" pitchFamily="50" charset="-128"/>
+            </a:endParaRPr>
           </a:p>
         </p:txBody>
       </p:sp>
@@ -5719,8 +4988,8 @@
                 <a:solidFill>
                   <a:srgbClr val="020202"/>
                 </a:solidFill>
-                <a:latin typeface="PT Serif" pitchFamily="34" charset="0"/>
-                <a:ea typeface="PT Serif" pitchFamily="34" charset="-122"/>
+                <a:latin typeface="Meiryo UI" panose="020B0604030504040204" pitchFamily="50" charset="-128"/>
+                <a:ea typeface="Meiryo UI" panose="020B0604030504040204" pitchFamily="50" charset="-128"/>
                 <a:cs typeface="PT Serif" pitchFamily="34" charset="-120"/>
               </a:rPr>
               <a:t>「なんとなく」から</a:t>
@@ -5730,8 +4999,8 @@
                 <a:solidFill>
                   <a:srgbClr val="E04F00"/>
                 </a:solidFill>
-                <a:latin typeface="PT Serif" pitchFamily="34" charset="0"/>
-                <a:ea typeface="PT Serif" pitchFamily="34" charset="-122"/>
+                <a:latin typeface="Meiryo UI" panose="020B0604030504040204" pitchFamily="50" charset="-128"/>
+                <a:ea typeface="Meiryo UI" panose="020B0604030504040204" pitchFamily="50" charset="-128"/>
                 <a:cs typeface="PT Serif" pitchFamily="34" charset="-120"/>
               </a:rPr>
               <a:t>「データで上達」</a:t>
@@ -5741,13 +5010,16 @@
                 <a:solidFill>
                   <a:srgbClr val="020202"/>
                 </a:solidFill>
-                <a:latin typeface="PT Serif" pitchFamily="34" charset="0"/>
-                <a:ea typeface="PT Serif" pitchFamily="34" charset="-122"/>
+                <a:latin typeface="Meiryo UI" panose="020B0604030504040204" pitchFamily="50" charset="-128"/>
+                <a:ea typeface="Meiryo UI" panose="020B0604030504040204" pitchFamily="50" charset="-128"/>
                 <a:cs typeface="PT Serif" pitchFamily="34" charset="-120"/>
               </a:rPr>
               <a:t>へ</a:t>
             </a:r>
-            <a:endParaRPr lang="ja-JP" sz="1700" dirty="0"/>
+            <a:endParaRPr lang="ja-JP" sz="1700" dirty="0">
+              <a:latin typeface="Meiryo UI" panose="020B0604030504040204" pitchFamily="50" charset="-128"/>
+              <a:ea typeface="Meiryo UI" panose="020B0604030504040204" pitchFamily="50" charset="-128"/>
+            </a:endParaRPr>
           </a:p>
         </p:txBody>
       </p:sp>
@@ -5785,13 +5057,16 @@
                 <a:solidFill>
                   <a:srgbClr val="383838"/>
                 </a:solidFill>
-                <a:latin typeface="DM Sans" pitchFamily="34" charset="0"/>
-                <a:ea typeface="DM Sans" pitchFamily="34" charset="-122"/>
+                <a:latin typeface="Meiryo UI" panose="020B0604030504040204" pitchFamily="50" charset="-128"/>
+                <a:ea typeface="Meiryo UI" panose="020B0604030504040204" pitchFamily="50" charset="-128"/>
                 <a:cs typeface="DM Sans" pitchFamily="34" charset="-120"/>
               </a:rPr>
               <a:t>感覚頼みの練習から脱却。自分の投球データを可視化し、AIが次の一手を提案します。</a:t>
             </a:r>
-            <a:endParaRPr lang="ja-JP" sz="1300" dirty="0"/>
+            <a:endParaRPr lang="ja-JP" sz="1300" dirty="0">
+              <a:latin typeface="Meiryo UI" panose="020B0604030504040204" pitchFamily="50" charset="-128"/>
+              <a:ea typeface="Meiryo UI" panose="020B0604030504040204" pitchFamily="50" charset="-128"/>
+            </a:endParaRPr>
           </a:p>
         </p:txBody>
       </p:sp>
@@ -5824,30 +5099,6 @@
           </a:p>
         </p:txBody>
       </p:sp>
-      <p:pic>
-        <p:nvPicPr>
-          <p:cNvPr id="7" name="Image 1" descr="preencoded.png"/>
-          <p:cNvPicPr>
-            <a:picLocks noChangeAspect="1"/>
-          </p:cNvPicPr>
-          <p:nvPr/>
-        </p:nvPicPr>
-        <p:blipFill>
-          <a:blip r:embed="rId4"/>
-          <a:stretch>
-            <a:fillRect/>
-          </a:stretch>
-        </p:blipFill>
-        <p:spPr>
-          <a:xfrm>
-            <a:off x="6473861" y="4165798"/>
-            <a:ext cx="209247" cy="167382"/>
-          </a:xfrm>
-          <a:prstGeom prst="rect">
-            <a:avLst/>
-          </a:prstGeom>
-        </p:spPr>
-      </p:pic>
       <p:sp>
         <p:nvSpPr>
           <p:cNvPr id="8" name="Text 4"/>
@@ -5886,9 +5137,23 @@
                 <a:ea typeface="DM Sans" pitchFamily="34" charset="-122"/>
                 <a:cs typeface="DM Sans" pitchFamily="34" charset="-120"/>
               </a:rPr>
-              <a:t>💡 サンプルデータ生成機能で、導入直後からダッシュボードを確認できます</a:t>
-            </a:r>
-            <a:endParaRPr lang="ja-JP" sz="1300" dirty="0"/>
+              <a:t> </a:t>
+            </a:r>
+            <a:r>
+              <a:rPr lang="ja-JP" altLang="en-US" sz="1300" dirty="0">
+                <a:solidFill>
+                  <a:srgbClr val="000000"/>
+                </a:solidFill>
+                <a:latin typeface="Meiryo UI" panose="020B0604030504040204" pitchFamily="50" charset="-128"/>
+                <a:ea typeface="Meiryo UI" panose="020B0604030504040204" pitchFamily="50" charset="-128"/>
+                <a:cs typeface="DM Sans" pitchFamily="34" charset="-120"/>
+              </a:rPr>
+              <a:t>サンプルデータ生成機能で、導入直後からダッシュボードを確認できます</a:t>
+            </a:r>
+            <a:endParaRPr lang="ja-JP" sz="1300" dirty="0">
+              <a:latin typeface="Meiryo UI" panose="020B0604030504040204" pitchFamily="50" charset="-128"/>
+              <a:ea typeface="Meiryo UI" panose="020B0604030504040204" pitchFamily="50" charset="-128"/>
+            </a:endParaRPr>
           </a:p>
         </p:txBody>
       </p:sp>
@@ -5902,7 +5167,7 @@
 
 <file path=ppt/slides/slide9.xml><?xml version="1.0" encoding="utf-8"?>
 <p:sld xmlns:a="http://schemas.openxmlformats.org/drawingml/2006/main" xmlns:r="http://schemas.openxmlformats.org/officeDocument/2006/relationships" xmlns:p="http://schemas.openxmlformats.org/presentationml/2006/main">
-  <p:cSld name="Slide 9">
+  <p:cSld name="Slide 10">
     <p:spTree>
       <p:nvGrpSpPr>
         <p:cNvPr id="1" name=""/>
@@ -5917,72 +5182,24 @@
           <a:chExt cx="0" cy="0"/>
         </a:xfrm>
       </p:grpSpPr>
-      <p:sp>
-        <p:nvSpPr>
-          <p:cNvPr id="2" name="Text 0"/>
-          <p:cNvSpPr/>
-          <p:nvPr/>
-        </p:nvSpPr>
-        <p:spPr>
-          <a:xfrm>
-            <a:off x="661475" y="1155005"/>
-            <a:ext cx="5571291" cy="620216"/>
-          </a:xfrm>
-          <a:prstGeom prst="rect">
-            <a:avLst/>
-          </a:prstGeom>
-          <a:noFill/>
-          <a:ln/>
-        </p:spPr>
-        <p:txBody>
-          <a:bodyPr wrap="none" lIns="0" tIns="0" rIns="0" bIns="0" rtlCol="0" anchor="t"/>
-          <a:lstStyle/>
-          <a:p>
-            <a:pPr marL="0" indent="0" algn="l">
-              <a:lnSpc>
-                <a:spcPct val="104000"/>
-              </a:lnSpc>
-              <a:buNone/>
-            </a:pPr>
-            <a:r>
-              <a:rPr lang="ja-JP" altLang="en-US" sz="3900" dirty="0">
-                <a:solidFill>
-                  <a:srgbClr val="020202"/>
-                </a:solidFill>
-                <a:latin typeface="PT Serif" pitchFamily="34" charset="0"/>
-                <a:ea typeface="PT Serif" pitchFamily="34" charset="-122"/>
-                <a:cs typeface="PT Serif" pitchFamily="34" charset="-120"/>
-              </a:rPr>
-              <a:t>技術スタック</a:t>
-            </a:r>
-            <a:endParaRPr lang="ja-JP" sz="3900" dirty="0"/>
-          </a:p>
-        </p:txBody>
-      </p:sp>
       <p:pic>
         <p:nvPicPr>
-          <p:cNvPr id="3" name="Image 0" descr="preencoded.png"/>
+          <p:cNvPr id="2" name="Image 0" descr="preencoded.png"/>
           <p:cNvPicPr>
             <a:picLocks noChangeAspect="1"/>
           </p:cNvPicPr>
           <p:nvPr/>
         </p:nvPicPr>
         <p:blipFill>
-          <a:blip>
-            <a:extLst>
-              <a:ext uri="{96DAC541-7B7A-43D3-8B79-37D633B846F1}">
-                <asvg:svgBlip xmlns:asvg="http://schemas.microsoft.com/office/drawing/2016/SVG/main" r:embed="rId3"/>
-              </a:ext>
-            </a:extLst>
-          </a:blip>
+          <a:blip r:embed="rId3"/>
           <a:stretch>
             <a:fillRect/>
           </a:stretch>
         </p:blipFill>
         <p:spPr>
           <a:xfrm>
-            <a:off x="661475" y="2153245"/>
-            <a:ext cx="472468" cy="472480"/>
+            <a:off x="7619809" y="0"/>
+            <a:ext cx="4571886" cy="6858000"/>
           </a:xfrm>
           <a:prstGeom prst="rect">
             <a:avLst/>
@@ -5991,14 +5208,59 @@
       </p:pic>
       <p:sp>
         <p:nvSpPr>
+          <p:cNvPr id="3" name="Text 0"/>
+          <p:cNvSpPr/>
+          <p:nvPr/>
+        </p:nvSpPr>
+        <p:spPr>
+          <a:xfrm>
+            <a:off x="661475" y="725289"/>
+            <a:ext cx="4578930" cy="496193"/>
+          </a:xfrm>
+          <a:prstGeom prst="rect">
+            <a:avLst/>
+          </a:prstGeom>
+          <a:noFill/>
+          <a:ln/>
+        </p:spPr>
+        <p:txBody>
+          <a:bodyPr wrap="none" lIns="0" tIns="0" rIns="0" bIns="0" rtlCol="0" anchor="t"/>
+          <a:lstStyle/>
+          <a:p>
+            <a:pPr marL="0" indent="0" algn="l">
+              <a:lnSpc>
+                <a:spcPct val="104000"/>
+              </a:lnSpc>
+              <a:buNone/>
+            </a:pPr>
+            <a:r>
+              <a:rPr lang="ja-JP" altLang="en-US" sz="3100" dirty="0">
+                <a:solidFill>
+                  <a:srgbClr val="020202"/>
+                </a:solidFill>
+                <a:latin typeface="Meiryo UI" panose="020B0604030504040204" pitchFamily="50" charset="-128"/>
+                <a:ea typeface="Meiryo UI" panose="020B0604030504040204" pitchFamily="50" charset="-128"/>
+                <a:cs typeface="PT Serif" pitchFamily="34" charset="-120"/>
+              </a:rPr>
+              <a:t>次のステップへ</a:t>
+            </a:r>
+            <a:endParaRPr lang="ja-JP" sz="3100" dirty="0">
+              <a:latin typeface="Meiryo UI" panose="020B0604030504040204" pitchFamily="50" charset="-128"/>
+              <a:ea typeface="Meiryo UI" panose="020B0604030504040204" pitchFamily="50" charset="-128"/>
+            </a:endParaRPr>
+          </a:p>
+        </p:txBody>
+      </p:sp>
+      <p:sp>
+        <p:nvSpPr>
           <p:cNvPr id="4" name="Text 1"/>
           <p:cNvSpPr/>
           <p:nvPr/>
         </p:nvSpPr>
         <p:spPr>
           <a:xfrm>
-            <a:off x="661475" y="2861965"/>
-            <a:ext cx="2480804" cy="310059"/>
+            <a:off x="661475" y="1402854"/>
+            <a:ext cx="6906444" cy="217686"/>
           </a:xfrm>
           <a:prstGeom prst="rect">
             <a:avLst/>
@@ -6012,109 +5274,291 @@
           <a:p>
             <a:pPr marL="0" indent="0" algn="l">
               <a:lnSpc>
+                <a:spcPct val="120000"/>
+              </a:lnSpc>
+              <a:buNone/>
+            </a:pPr>
+            <a:r>
+              <a:rPr lang="ja-JP" altLang="en-US" sz="1150" dirty="0">
+                <a:solidFill>
+                  <a:srgbClr val="383838"/>
+                </a:solidFill>
+                <a:latin typeface="Meiryo UI" panose="020B0604030504040204" pitchFamily="50" charset="-128"/>
+                <a:ea typeface="Meiryo UI" panose="020B0604030504040204" pitchFamily="50" charset="-128"/>
+                <a:cs typeface="DM Sans" pitchFamily="34" charset="-120"/>
+              </a:rPr>
+              <a:t>AI Bowling Master で、ボウリング場とプレイヤーの双方に</a:t>
+            </a:r>
+            <a:r>
+              <a:rPr lang="ja-JP" altLang="en-US" sz="1150" dirty="0">
+                <a:solidFill>
+                  <a:srgbClr val="E04F00"/>
+                </a:solidFill>
+                <a:latin typeface="Meiryo UI" panose="020B0604030504040204" pitchFamily="50" charset="-128"/>
+                <a:ea typeface="Meiryo UI" panose="020B0604030504040204" pitchFamily="50" charset="-128"/>
+                <a:cs typeface="DM Sans" pitchFamily="34" charset="-120"/>
+              </a:rPr>
+              <a:t>データドリブンな上達体験</a:t>
+            </a:r>
+            <a:r>
+              <a:rPr lang="ja-JP" altLang="en-US" sz="1150" dirty="0">
+                <a:solidFill>
+                  <a:srgbClr val="383838"/>
+                </a:solidFill>
+                <a:latin typeface="Meiryo UI" panose="020B0604030504040204" pitchFamily="50" charset="-128"/>
+                <a:ea typeface="Meiryo UI" panose="020B0604030504040204" pitchFamily="50" charset="-128"/>
+                <a:cs typeface="DM Sans" pitchFamily="34" charset="-120"/>
+              </a:rPr>
+              <a:t>を。</a:t>
+            </a:r>
+            <a:endParaRPr lang="ja-JP" sz="1150" dirty="0">
+              <a:latin typeface="Meiryo UI" panose="020B0604030504040204" pitchFamily="50" charset="-128"/>
+              <a:ea typeface="Meiryo UI" panose="020B0604030504040204" pitchFamily="50" charset="-128"/>
+            </a:endParaRPr>
+          </a:p>
+        </p:txBody>
+      </p:sp>
+      <p:sp>
+        <p:nvSpPr>
+          <p:cNvPr id="5" name="Text 2"/>
+          <p:cNvSpPr/>
+          <p:nvPr/>
+        </p:nvSpPr>
+        <p:spPr>
+          <a:xfrm>
+            <a:off x="661475" y="1756569"/>
+            <a:ext cx="302411" cy="189012"/>
+          </a:xfrm>
+          <a:prstGeom prst="rect">
+            <a:avLst/>
+          </a:prstGeom>
+          <a:noFill/>
+          <a:ln/>
+        </p:spPr>
+        <p:txBody>
+          <a:bodyPr wrap="none" lIns="0" tIns="0" rIns="0" bIns="0" rtlCol="0" anchor="ctr"/>
+          <a:lstStyle/>
+          <a:p>
+            <a:pPr marL="0" indent="0" algn="l">
+              <a:lnSpc>
+                <a:spcPct val="100000"/>
+              </a:lnSpc>
+              <a:buNone/>
+            </a:pPr>
+            <a:r>
+              <a:rPr lang="en-US" sz="1150" dirty="0">
+                <a:solidFill>
+                  <a:srgbClr val="383838"/>
+                </a:solidFill>
+                <a:latin typeface="Meiryo UI" panose="020B0604030504040204" pitchFamily="50" charset="-128"/>
+                <a:ea typeface="Meiryo UI" panose="020B0604030504040204" pitchFamily="50" charset="-128"/>
+                <a:cs typeface="PT Serif Light" pitchFamily="34" charset="-120"/>
+              </a:rPr>
+              <a:t>01</a:t>
+            </a:r>
+            <a:endParaRPr lang="en-US" sz="1150" dirty="0">
+              <a:latin typeface="Meiryo UI" panose="020B0604030504040204" pitchFamily="50" charset="-128"/>
+              <a:ea typeface="Meiryo UI" panose="020B0604030504040204" pitchFamily="50" charset="-128"/>
+            </a:endParaRPr>
+          </a:p>
+        </p:txBody>
+      </p:sp>
+      <p:sp>
+        <p:nvSpPr>
+          <p:cNvPr id="6" name="Shape 3"/>
+          <p:cNvSpPr/>
+          <p:nvPr/>
+        </p:nvSpPr>
+        <p:spPr>
+          <a:xfrm>
+            <a:off x="661475" y="1994495"/>
+            <a:ext cx="6296860" cy="19050"/>
+          </a:xfrm>
+          <a:prstGeom prst="rect">
+            <a:avLst/>
+          </a:prstGeom>
+          <a:solidFill>
+            <a:srgbClr val="E04F00"/>
+          </a:solidFill>
+          <a:ln/>
+        </p:spPr>
+        <p:txBody>
+          <a:bodyPr/>
+          <a:lstStyle/>
+          <a:p>
+            <a:endParaRPr lang="ja-JP" altLang="en-US"/>
+          </a:p>
+        </p:txBody>
+      </p:sp>
+      <p:sp>
+        <p:nvSpPr>
+          <p:cNvPr id="7" name="Text 4"/>
+          <p:cNvSpPr/>
+          <p:nvPr/>
+        </p:nvSpPr>
+        <p:spPr>
+          <a:xfrm>
+            <a:off x="661475" y="2108200"/>
+            <a:ext cx="1984623" cy="248047"/>
+          </a:xfrm>
+          <a:prstGeom prst="rect">
+            <a:avLst/>
+          </a:prstGeom>
+          <a:noFill/>
+          <a:ln/>
+        </p:spPr>
+        <p:txBody>
+          <a:bodyPr wrap="none" lIns="0" tIns="0" rIns="0" bIns="0" rtlCol="0" anchor="t"/>
+          <a:lstStyle/>
+          <a:p>
+            <a:pPr marL="0" indent="0" algn="l">
+              <a:lnSpc>
                 <a:spcPct val="104000"/>
               </a:lnSpc>
               <a:buNone/>
             </a:pPr>
             <a:r>
-              <a:rPr lang="en-US" sz="1950" dirty="0">
-                <a:solidFill>
-                  <a:srgbClr val="383838"/>
-                </a:solidFill>
-                <a:latin typeface="PT Serif" pitchFamily="34" charset="0"/>
-                <a:ea typeface="PT Serif" pitchFamily="34" charset="-122"/>
+              <a:rPr lang="ja-JP" altLang="en-US" sz="1550" dirty="0">
+                <a:solidFill>
+                  <a:srgbClr val="383838"/>
+                </a:solidFill>
+                <a:latin typeface="Meiryo UI" panose="020B0604030504040204" pitchFamily="50" charset="-128"/>
+                <a:ea typeface="Meiryo UI" panose="020B0604030504040204" pitchFamily="50" charset="-128"/>
                 <a:cs typeface="PT Serif" pitchFamily="34" charset="-120"/>
               </a:rPr>
-              <a:t>Flutter</a:t>
-            </a:r>
-            <a:endParaRPr lang="en-US" sz="1950" dirty="0"/>
-          </a:p>
-        </p:txBody>
-      </p:sp>
-      <p:sp>
-        <p:nvSpPr>
-          <p:cNvPr id="5" name="Text 2"/>
-          <p:cNvSpPr/>
-          <p:nvPr/>
-        </p:nvSpPr>
-        <p:spPr>
-          <a:xfrm>
-            <a:off x="661475" y="3285430"/>
-            <a:ext cx="5316206" cy="604838"/>
-          </a:xfrm>
-          <a:prstGeom prst="rect">
-            <a:avLst/>
-          </a:prstGeom>
-          <a:noFill/>
-          <a:ln/>
-        </p:spPr>
-        <p:txBody>
-          <a:bodyPr wrap="square" lIns="0" tIns="0" rIns="0" bIns="0" rtlCol="0" anchor="t">
-            <a:normAutofit/>
-          </a:bodyPr>
+              <a:t>プロトタイプ開発</a:t>
+            </a:r>
+            <a:endParaRPr lang="ja-JP" sz="1550" dirty="0">
+              <a:latin typeface="Meiryo UI" panose="020B0604030504040204" pitchFamily="50" charset="-128"/>
+              <a:ea typeface="Meiryo UI" panose="020B0604030504040204" pitchFamily="50" charset="-128"/>
+            </a:endParaRPr>
+          </a:p>
+        </p:txBody>
+      </p:sp>
+      <p:sp>
+        <p:nvSpPr>
+          <p:cNvPr id="8" name="Text 5"/>
+          <p:cNvSpPr/>
+          <p:nvPr/>
+        </p:nvSpPr>
+        <p:spPr>
+          <a:xfrm>
+            <a:off x="661475" y="2428776"/>
+            <a:ext cx="6296860" cy="217686"/>
+          </a:xfrm>
+          <a:prstGeom prst="rect">
+            <a:avLst/>
+          </a:prstGeom>
+          <a:noFill/>
+          <a:ln/>
+        </p:spPr>
+        <p:txBody>
+          <a:bodyPr wrap="none" lIns="0" tIns="0" rIns="0" bIns="0" rtlCol="0" anchor="t"/>
           <a:lstStyle/>
           <a:p>
             <a:pPr marL="0" indent="0" algn="l">
               <a:lnSpc>
-                <a:spcPct val="133000"/>
-              </a:lnSpc>
-              <a:buNone/>
-            </a:pPr>
-            <a:r>
-              <a:rPr lang="ja-JP" altLang="en-US" sz="1450" dirty="0">
-                <a:solidFill>
-                  <a:srgbClr val="383838"/>
-                </a:solidFill>
-                <a:latin typeface="DM Sans" pitchFamily="34" charset="0"/>
-                <a:ea typeface="DM Sans" pitchFamily="34" charset="-122"/>
+                <a:spcPct val="120000"/>
+              </a:lnSpc>
+              <a:buNone/>
+            </a:pPr>
+            <a:r>
+              <a:rPr lang="ja-JP" altLang="en-US" sz="1150" dirty="0">
+                <a:solidFill>
+                  <a:srgbClr val="383838"/>
+                </a:solidFill>
+                <a:latin typeface="Meiryo UI" panose="020B0604030504040204" pitchFamily="50" charset="-128"/>
+                <a:ea typeface="Meiryo UI" panose="020B0604030504040204" pitchFamily="50" charset="-128"/>
                 <a:cs typeface="DM Sans" pitchFamily="34" charset="-120"/>
               </a:rPr>
-              <a:t>iOS・Android・デスクトップ対応のクロスプラットフォーム開発</a:t>
-            </a:r>
-            <a:endParaRPr lang="ja-JP" sz="1450" dirty="0"/>
-          </a:p>
-        </p:txBody>
-      </p:sp>
-      <p:pic>
-        <p:nvPicPr>
-          <p:cNvPr id="6" name="Image 1" descr="preencoded.png"/>
-          <p:cNvPicPr>
-            <a:picLocks noChangeAspect="1"/>
-          </p:cNvPicPr>
-          <p:nvPr/>
-        </p:nvPicPr>
-        <p:blipFill>
-          <a:blip>
-            <a:extLst>
-              <a:ext uri="{96DAC541-7B7A-43D3-8B79-37D633B846F1}">
-                <asvg:svgBlip xmlns:asvg="http://schemas.microsoft.com/office/drawing/2016/SVG/main" r:embed="rId4"/>
-              </a:ext>
-            </a:extLst>
-          </a:blip>
-          <a:stretch>
-            <a:fillRect/>
-          </a:stretch>
-        </p:blipFill>
-        <p:spPr>
-          <a:xfrm>
-            <a:off x="6213915" y="2153245"/>
-            <a:ext cx="472468" cy="472480"/>
-          </a:xfrm>
-          <a:prstGeom prst="rect">
-            <a:avLst/>
-          </a:prstGeom>
-        </p:spPr>
-      </p:pic>
-      <p:sp>
-        <p:nvSpPr>
-          <p:cNvPr id="7" name="Text 3"/>
-          <p:cNvSpPr/>
-          <p:nvPr/>
-        </p:nvSpPr>
-        <p:spPr>
-          <a:xfrm>
-            <a:off x="6213915" y="2861965"/>
-            <a:ext cx="2480804" cy="310059"/>
+              <a:t>スコア入力・ヒートマップ表示の実装</a:t>
+            </a:r>
+            <a:endParaRPr lang="ja-JP" sz="1150" dirty="0">
+              <a:latin typeface="Meiryo UI" panose="020B0604030504040204" pitchFamily="50" charset="-128"/>
+              <a:ea typeface="Meiryo UI" panose="020B0604030504040204" pitchFamily="50" charset="-128"/>
+            </a:endParaRPr>
+          </a:p>
+        </p:txBody>
+      </p:sp>
+      <p:sp>
+        <p:nvSpPr>
+          <p:cNvPr id="9" name="Text 6"/>
+          <p:cNvSpPr/>
+          <p:nvPr/>
+        </p:nvSpPr>
+        <p:spPr>
+          <a:xfrm>
+            <a:off x="661475" y="2880816"/>
+            <a:ext cx="302411" cy="189012"/>
+          </a:xfrm>
+          <a:prstGeom prst="rect">
+            <a:avLst/>
+          </a:prstGeom>
+          <a:noFill/>
+          <a:ln/>
+        </p:spPr>
+        <p:txBody>
+          <a:bodyPr wrap="none" lIns="0" tIns="0" rIns="0" bIns="0" rtlCol="0" anchor="ctr"/>
+          <a:lstStyle/>
+          <a:p>
+            <a:pPr marL="0" indent="0" algn="l">
+              <a:lnSpc>
+                <a:spcPct val="100000"/>
+              </a:lnSpc>
+              <a:buNone/>
+            </a:pPr>
+            <a:r>
+              <a:rPr lang="en-US" sz="1150" dirty="0">
+                <a:solidFill>
+                  <a:srgbClr val="383838"/>
+                </a:solidFill>
+                <a:latin typeface="Meiryo UI" panose="020B0604030504040204" pitchFamily="50" charset="-128"/>
+                <a:ea typeface="Meiryo UI" panose="020B0604030504040204" pitchFamily="50" charset="-128"/>
+                <a:cs typeface="PT Serif Light" pitchFamily="34" charset="-120"/>
+              </a:rPr>
+              <a:t>02</a:t>
+            </a:r>
+            <a:endParaRPr lang="en-US" sz="1150" dirty="0"/>
+          </a:p>
+        </p:txBody>
+      </p:sp>
+      <p:sp>
+        <p:nvSpPr>
+          <p:cNvPr id="10" name="Shape 7"/>
+          <p:cNvSpPr/>
+          <p:nvPr/>
+        </p:nvSpPr>
+        <p:spPr>
+          <a:xfrm>
+            <a:off x="661475" y="3118743"/>
+            <a:ext cx="6296860" cy="19050"/>
+          </a:xfrm>
+          <a:prstGeom prst="rect">
+            <a:avLst/>
+          </a:prstGeom>
+          <a:solidFill>
+            <a:srgbClr val="E04F00"/>
+          </a:solidFill>
+          <a:ln/>
+        </p:spPr>
+        <p:txBody>
+          <a:bodyPr/>
+          <a:lstStyle/>
+          <a:p>
+            <a:endParaRPr lang="ja-JP" altLang="en-US"/>
+          </a:p>
+        </p:txBody>
+      </p:sp>
+      <p:sp>
+        <p:nvSpPr>
+          <p:cNvPr id="11" name="Text 8"/>
+          <p:cNvSpPr/>
+          <p:nvPr/>
+        </p:nvSpPr>
+        <p:spPr>
+          <a:xfrm>
+            <a:off x="661475" y="3232448"/>
+            <a:ext cx="1984623" cy="248047"/>
           </a:xfrm>
           <a:prstGeom prst="rect">
             <a:avLst/>
@@ -6133,30 +5577,33 @@
               <a:buNone/>
             </a:pPr>
             <a:r>
-              <a:rPr lang="en-US" sz="1950" dirty="0">
-                <a:solidFill>
-                  <a:srgbClr val="383838"/>
-                </a:solidFill>
-                <a:latin typeface="PT Serif" pitchFamily="34" charset="0"/>
-                <a:ea typeface="PT Serif" pitchFamily="34" charset="-122"/>
+              <a:rPr lang="ja-JP" altLang="en-US" sz="1550" dirty="0">
+                <a:solidFill>
+                  <a:srgbClr val="383838"/>
+                </a:solidFill>
+                <a:latin typeface="Meiryo UI" panose="020B0604030504040204" pitchFamily="50" charset="-128"/>
+                <a:ea typeface="Meiryo UI" panose="020B0604030504040204" pitchFamily="50" charset="-128"/>
                 <a:cs typeface="PT Serif" pitchFamily="34" charset="-120"/>
               </a:rPr>
-              <a:t>Firestore</a:t>
-            </a:r>
-            <a:endParaRPr lang="en-US" sz="1950" dirty="0"/>
-          </a:p>
-        </p:txBody>
-      </p:sp>
-      <p:sp>
-        <p:nvSpPr>
-          <p:cNvPr id="8" name="Text 4"/>
-          <p:cNvSpPr/>
-          <p:nvPr/>
-        </p:nvSpPr>
-        <p:spPr>
-          <a:xfrm>
-            <a:off x="6213915" y="3285430"/>
-            <a:ext cx="5316305" cy="302419"/>
+              <a:t>AIコーチ連携</a:t>
+            </a:r>
+            <a:endParaRPr lang="ja-JP" sz="1550" dirty="0">
+              <a:latin typeface="Meiryo UI" panose="020B0604030504040204" pitchFamily="50" charset="-128"/>
+              <a:ea typeface="Meiryo UI" panose="020B0604030504040204" pitchFamily="50" charset="-128"/>
+            </a:endParaRPr>
+          </a:p>
+        </p:txBody>
+      </p:sp>
+      <p:sp>
+        <p:nvSpPr>
+          <p:cNvPr id="12" name="Text 9"/>
+          <p:cNvSpPr/>
+          <p:nvPr/>
+        </p:nvSpPr>
+        <p:spPr>
+          <a:xfrm>
+            <a:off x="661475" y="3553023"/>
+            <a:ext cx="6296860" cy="217686"/>
           </a:xfrm>
           <a:prstGeom prst="rect">
             <a:avLst/>
@@ -6170,65 +5617,110 @@
           <a:p>
             <a:pPr marL="0" indent="0" algn="l">
               <a:lnSpc>
-                <a:spcPct val="133000"/>
-              </a:lnSpc>
-              <a:buNone/>
-            </a:pPr>
-            <a:r>
-              <a:rPr lang="ja-JP" altLang="en-US" sz="1450" dirty="0">
-                <a:solidFill>
-                  <a:srgbClr val="383838"/>
-                </a:solidFill>
-                <a:latin typeface="DM Sans" pitchFamily="34" charset="0"/>
-                <a:ea typeface="DM Sans" pitchFamily="34" charset="-122"/>
+                <a:spcPct val="120000"/>
+              </a:lnSpc>
+              <a:buNone/>
+            </a:pPr>
+            <a:r>
+              <a:rPr lang="ja-JP" altLang="en-US" sz="1150" dirty="0">
+                <a:solidFill>
+                  <a:srgbClr val="383838"/>
+                </a:solidFill>
+                <a:latin typeface="Meiryo UI" panose="020B0604030504040204" pitchFamily="50" charset="-128"/>
+                <a:ea typeface="Meiryo UI" panose="020B0604030504040204" pitchFamily="50" charset="-128"/>
                 <a:cs typeface="DM Sans" pitchFamily="34" charset="-120"/>
               </a:rPr>
-              <a:t>CloudSyncServiceによるリアルタイム同期とデータ永続化</a:t>
-            </a:r>
-            <a:endParaRPr lang="ja-JP" sz="1450" dirty="0"/>
-          </a:p>
-        </p:txBody>
-      </p:sp>
-      <p:pic>
-        <p:nvPicPr>
-          <p:cNvPr id="9" name="Image 2" descr="preencoded.png"/>
-          <p:cNvPicPr>
-            <a:picLocks noChangeAspect="1"/>
-          </p:cNvPicPr>
-          <p:nvPr/>
-        </p:nvPicPr>
-        <p:blipFill>
-          <a:blip>
-            <a:extLst>
-              <a:ext uri="{96DAC541-7B7A-43D3-8B79-37D633B846F1}">
-                <asvg:svgBlip xmlns:asvg="http://schemas.microsoft.com/office/drawing/2016/SVG/main" r:embed="rId5"/>
-              </a:ext>
-            </a:extLst>
-          </a:blip>
-          <a:stretch>
-            <a:fillRect/>
-          </a:stretch>
-        </p:blipFill>
-        <p:spPr>
-          <a:xfrm>
-            <a:off x="661475" y="4268291"/>
-            <a:ext cx="472468" cy="472480"/>
-          </a:xfrm>
-          <a:prstGeom prst="rect">
-            <a:avLst/>
-          </a:prstGeom>
-        </p:spPr>
-      </p:pic>
-      <p:sp>
-        <p:nvSpPr>
-          <p:cNvPr id="10" name="Text 5"/>
-          <p:cNvSpPr/>
-          <p:nvPr/>
-        </p:nvSpPr>
-        <p:spPr>
-          <a:xfrm>
-            <a:off x="661475" y="4977011"/>
-            <a:ext cx="2480804" cy="310059"/>
+              <a:t>投球データ分析エンジンの組み込み</a:t>
+            </a:r>
+            <a:endParaRPr lang="ja-JP" sz="1150" dirty="0">
+              <a:latin typeface="Meiryo UI" panose="020B0604030504040204" pitchFamily="50" charset="-128"/>
+              <a:ea typeface="Meiryo UI" panose="020B0604030504040204" pitchFamily="50" charset="-128"/>
+            </a:endParaRPr>
+          </a:p>
+        </p:txBody>
+      </p:sp>
+      <p:sp>
+        <p:nvSpPr>
+          <p:cNvPr id="13" name="Text 10"/>
+          <p:cNvSpPr/>
+          <p:nvPr/>
+        </p:nvSpPr>
+        <p:spPr>
+          <a:xfrm>
+            <a:off x="661475" y="4005064"/>
+            <a:ext cx="302411" cy="189012"/>
+          </a:xfrm>
+          <a:prstGeom prst="rect">
+            <a:avLst/>
+          </a:prstGeom>
+          <a:noFill/>
+          <a:ln/>
+        </p:spPr>
+        <p:txBody>
+          <a:bodyPr wrap="none" lIns="0" tIns="0" rIns="0" bIns="0" rtlCol="0" anchor="ctr"/>
+          <a:lstStyle/>
+          <a:p>
+            <a:pPr marL="0" indent="0" algn="l">
+              <a:lnSpc>
+                <a:spcPct val="100000"/>
+              </a:lnSpc>
+              <a:buNone/>
+            </a:pPr>
+            <a:r>
+              <a:rPr lang="en-US" sz="1150" dirty="0">
+                <a:solidFill>
+                  <a:srgbClr val="383838"/>
+                </a:solidFill>
+                <a:latin typeface="Meiryo UI" panose="020B0604030504040204" pitchFamily="50" charset="-128"/>
+                <a:ea typeface="Meiryo UI" panose="020B0604030504040204" pitchFamily="50" charset="-128"/>
+                <a:cs typeface="PT Serif Light" pitchFamily="34" charset="-120"/>
+              </a:rPr>
+              <a:t>03</a:t>
+            </a:r>
+            <a:endParaRPr lang="en-US" sz="1150" dirty="0">
+              <a:latin typeface="Meiryo UI" panose="020B0604030504040204" pitchFamily="50" charset="-128"/>
+              <a:ea typeface="Meiryo UI" panose="020B0604030504040204" pitchFamily="50" charset="-128"/>
+            </a:endParaRPr>
+          </a:p>
+        </p:txBody>
+      </p:sp>
+      <p:sp>
+        <p:nvSpPr>
+          <p:cNvPr id="14" name="Shape 11"/>
+          <p:cNvSpPr/>
+          <p:nvPr/>
+        </p:nvSpPr>
+        <p:spPr>
+          <a:xfrm>
+            <a:off x="661475" y="4242991"/>
+            <a:ext cx="6296860" cy="19050"/>
+          </a:xfrm>
+          <a:prstGeom prst="rect">
+            <a:avLst/>
+          </a:prstGeom>
+          <a:solidFill>
+            <a:srgbClr val="E04F00"/>
+          </a:solidFill>
+          <a:ln/>
+        </p:spPr>
+        <p:txBody>
+          <a:bodyPr/>
+          <a:lstStyle/>
+          <a:p>
+            <a:endParaRPr lang="ja-JP" altLang="en-US"/>
+          </a:p>
+        </p:txBody>
+      </p:sp>
+      <p:sp>
+        <p:nvSpPr>
+          <p:cNvPr id="15" name="Text 12"/>
+          <p:cNvSpPr/>
+          <p:nvPr/>
+        </p:nvSpPr>
+        <p:spPr>
+          <a:xfrm>
+            <a:off x="661475" y="4356695"/>
+            <a:ext cx="1984623" cy="248047"/>
           </a:xfrm>
           <a:prstGeom prst="rect">
             <a:avLst/>
@@ -6247,30 +5739,33 @@
               <a:buNone/>
             </a:pPr>
             <a:r>
-              <a:rPr lang="ja-JP" altLang="en-US" sz="1950" dirty="0">
-                <a:solidFill>
-                  <a:srgbClr val="383838"/>
-                </a:solidFill>
-                <a:latin typeface="PT Serif" pitchFamily="34" charset="0"/>
-                <a:ea typeface="PT Serif" pitchFamily="34" charset="-122"/>
+              <a:rPr lang="ja-JP" altLang="en-US" sz="1550" dirty="0">
+                <a:solidFill>
+                  <a:srgbClr val="383838"/>
+                </a:solidFill>
+                <a:latin typeface="Meiryo UI" panose="020B0604030504040204" pitchFamily="50" charset="-128"/>
+                <a:ea typeface="Meiryo UI" panose="020B0604030504040204" pitchFamily="50" charset="-128"/>
                 <a:cs typeface="PT Serif" pitchFamily="34" charset="-120"/>
               </a:rPr>
-              <a:t>AIコーチエンジン</a:t>
-            </a:r>
-            <a:endParaRPr lang="ja-JP" sz="1950" dirty="0"/>
-          </a:p>
-        </p:txBody>
-      </p:sp>
-      <p:sp>
-        <p:nvSpPr>
-          <p:cNvPr id="11" name="Text 6"/>
-          <p:cNvSpPr/>
-          <p:nvPr/>
-        </p:nvSpPr>
-        <p:spPr>
-          <a:xfrm>
-            <a:off x="661475" y="5400477"/>
-            <a:ext cx="5316206" cy="302419"/>
+              <a:t>フィールドテスト</a:t>
+            </a:r>
+            <a:endParaRPr lang="ja-JP" sz="1550" dirty="0">
+              <a:latin typeface="Meiryo UI" panose="020B0604030504040204" pitchFamily="50" charset="-128"/>
+              <a:ea typeface="Meiryo UI" panose="020B0604030504040204" pitchFamily="50" charset="-128"/>
+            </a:endParaRPr>
+          </a:p>
+        </p:txBody>
+      </p:sp>
+      <p:sp>
+        <p:nvSpPr>
+          <p:cNvPr id="16" name="Text 13"/>
+          <p:cNvSpPr/>
+          <p:nvPr/>
+        </p:nvSpPr>
+        <p:spPr>
+          <a:xfrm>
+            <a:off x="661475" y="4677271"/>
+            <a:ext cx="6296860" cy="217686"/>
           </a:xfrm>
           <a:prstGeom prst="rect">
             <a:avLst/>
@@ -6284,65 +5779,110 @@
           <a:p>
             <a:pPr marL="0" indent="0" algn="l">
               <a:lnSpc>
-                <a:spcPct val="133000"/>
-              </a:lnSpc>
-              <a:buNone/>
-            </a:pPr>
-            <a:r>
-              <a:rPr lang="ja-JP" altLang="en-US" sz="1450" dirty="0">
-                <a:solidFill>
-                  <a:srgbClr val="383838"/>
-                </a:solidFill>
-                <a:latin typeface="DM Sans" pitchFamily="34" charset="0"/>
-                <a:ea typeface="DM Sans" pitchFamily="34" charset="-122"/>
+                <a:spcPct val="120000"/>
+              </a:lnSpc>
+              <a:buNone/>
+            </a:pPr>
+            <a:r>
+              <a:rPr lang="ja-JP" altLang="en-US" sz="1150" dirty="0">
+                <a:solidFill>
+                  <a:srgbClr val="383838"/>
+                </a:solidFill>
+                <a:latin typeface="Meiryo UI" panose="020B0604030504040204" pitchFamily="50" charset="-128"/>
+                <a:ea typeface="Meiryo UI" panose="020B0604030504040204" pitchFamily="50" charset="-128"/>
                 <a:cs typeface="DM Sans" pitchFamily="34" charset="-120"/>
               </a:rPr>
-              <a:t>投球履歴を分析し、個別最適化された改善アドバイスを生成</a:t>
-            </a:r>
-            <a:endParaRPr lang="ja-JP" sz="1450" dirty="0"/>
-          </a:p>
-        </p:txBody>
-      </p:sp>
-      <p:pic>
-        <p:nvPicPr>
-          <p:cNvPr id="12" name="Image 3" descr="preencoded.png"/>
-          <p:cNvPicPr>
-            <a:picLocks noChangeAspect="1"/>
-          </p:cNvPicPr>
-          <p:nvPr/>
-        </p:nvPicPr>
-        <p:blipFill>
-          <a:blip>
-            <a:extLst>
-              <a:ext uri="{96DAC541-7B7A-43D3-8B79-37D633B846F1}">
-                <asvg:svgBlip xmlns:asvg="http://schemas.microsoft.com/office/drawing/2016/SVG/main" r:embed="rId6"/>
-              </a:ext>
-            </a:extLst>
-          </a:blip>
-          <a:stretch>
-            <a:fillRect/>
-          </a:stretch>
-        </p:blipFill>
-        <p:spPr>
-          <a:xfrm>
-            <a:off x="6213915" y="4268291"/>
-            <a:ext cx="472468" cy="472480"/>
-          </a:xfrm>
-          <a:prstGeom prst="rect">
-            <a:avLst/>
-          </a:prstGeom>
-        </p:spPr>
-      </p:pic>
-      <p:sp>
-        <p:nvSpPr>
-          <p:cNvPr id="13" name="Text 7"/>
-          <p:cNvSpPr/>
-          <p:nvPr/>
-        </p:nvSpPr>
-        <p:spPr>
-          <a:xfrm>
-            <a:off x="6213915" y="4977011"/>
-            <a:ext cx="2480804" cy="310059"/>
+              <a:t>ボウリング場での実証・フィードバック収集</a:t>
+            </a:r>
+            <a:endParaRPr lang="ja-JP" sz="1150" dirty="0">
+              <a:latin typeface="Meiryo UI" panose="020B0604030504040204" pitchFamily="50" charset="-128"/>
+              <a:ea typeface="Meiryo UI" panose="020B0604030504040204" pitchFamily="50" charset="-128"/>
+            </a:endParaRPr>
+          </a:p>
+        </p:txBody>
+      </p:sp>
+      <p:sp>
+        <p:nvSpPr>
+          <p:cNvPr id="17" name="Text 14"/>
+          <p:cNvSpPr/>
+          <p:nvPr/>
+        </p:nvSpPr>
+        <p:spPr>
+          <a:xfrm>
+            <a:off x="661475" y="5129312"/>
+            <a:ext cx="302411" cy="189012"/>
+          </a:xfrm>
+          <a:prstGeom prst="rect">
+            <a:avLst/>
+          </a:prstGeom>
+          <a:noFill/>
+          <a:ln/>
+        </p:spPr>
+        <p:txBody>
+          <a:bodyPr wrap="none" lIns="0" tIns="0" rIns="0" bIns="0" rtlCol="0" anchor="ctr"/>
+          <a:lstStyle/>
+          <a:p>
+            <a:pPr marL="0" indent="0" algn="l">
+              <a:lnSpc>
+                <a:spcPct val="100000"/>
+              </a:lnSpc>
+              <a:buNone/>
+            </a:pPr>
+            <a:r>
+              <a:rPr lang="en-US" sz="1150" dirty="0">
+                <a:solidFill>
+                  <a:srgbClr val="383838"/>
+                </a:solidFill>
+                <a:latin typeface="Meiryo UI" panose="020B0604030504040204" pitchFamily="50" charset="-128"/>
+                <a:ea typeface="Meiryo UI" panose="020B0604030504040204" pitchFamily="50" charset="-128"/>
+                <a:cs typeface="PT Serif Light" pitchFamily="34" charset="-120"/>
+              </a:rPr>
+              <a:t>04</a:t>
+            </a:r>
+            <a:endParaRPr lang="en-US" sz="1150" dirty="0">
+              <a:latin typeface="Meiryo UI" panose="020B0604030504040204" pitchFamily="50" charset="-128"/>
+              <a:ea typeface="Meiryo UI" panose="020B0604030504040204" pitchFamily="50" charset="-128"/>
+            </a:endParaRPr>
+          </a:p>
+        </p:txBody>
+      </p:sp>
+      <p:sp>
+        <p:nvSpPr>
+          <p:cNvPr id="18" name="Shape 15"/>
+          <p:cNvSpPr/>
+          <p:nvPr/>
+        </p:nvSpPr>
+        <p:spPr>
+          <a:xfrm>
+            <a:off x="661475" y="5367238"/>
+            <a:ext cx="6296860" cy="19050"/>
+          </a:xfrm>
+          <a:prstGeom prst="rect">
+            <a:avLst/>
+          </a:prstGeom>
+          <a:solidFill>
+            <a:srgbClr val="E04F00"/>
+          </a:solidFill>
+          <a:ln/>
+        </p:spPr>
+        <p:txBody>
+          <a:bodyPr/>
+          <a:lstStyle/>
+          <a:p>
+            <a:endParaRPr lang="ja-JP" altLang="en-US"/>
+          </a:p>
+        </p:txBody>
+      </p:sp>
+      <p:sp>
+        <p:nvSpPr>
+          <p:cNvPr id="19" name="Text 16"/>
+          <p:cNvSpPr/>
+          <p:nvPr/>
+        </p:nvSpPr>
+        <p:spPr>
+          <a:xfrm>
+            <a:off x="661475" y="5480943"/>
+            <a:ext cx="1984623" cy="248047"/>
           </a:xfrm>
           <a:prstGeom prst="rect">
             <a:avLst/>
@@ -6361,30 +5901,33 @@
               <a:buNone/>
             </a:pPr>
             <a:r>
-              <a:rPr lang="ja-JP" altLang="en-US" sz="1950" dirty="0">
-                <a:solidFill>
-                  <a:srgbClr val="383838"/>
-                </a:solidFill>
-                <a:latin typeface="PT Serif" pitchFamily="34" charset="0"/>
-                <a:ea typeface="PT Serif" pitchFamily="34" charset="-122"/>
+              <a:rPr lang="ja-JP" altLang="en-US" sz="1550" dirty="0">
+                <a:solidFill>
+                  <a:srgbClr val="383838"/>
+                </a:solidFill>
+                <a:latin typeface="Meiryo UI" panose="020B0604030504040204" pitchFamily="50" charset="-128"/>
+                <a:ea typeface="Meiryo UI" panose="020B0604030504040204" pitchFamily="50" charset="-128"/>
                 <a:cs typeface="PT Serif" pitchFamily="34" charset="-120"/>
               </a:rPr>
-              <a:t>OCR スコア読取</a:t>
-            </a:r>
-            <a:endParaRPr lang="ja-JP" sz="1950" dirty="0"/>
-          </a:p>
-        </p:txBody>
-      </p:sp>
-      <p:sp>
-        <p:nvSpPr>
-          <p:cNvPr id="14" name="Text 8"/>
-          <p:cNvSpPr/>
-          <p:nvPr/>
-        </p:nvSpPr>
-        <p:spPr>
-          <a:xfrm>
-            <a:off x="6213915" y="5400477"/>
-            <a:ext cx="5316305" cy="302419"/>
+              <a:t>ローンチ</a:t>
+            </a:r>
+            <a:endParaRPr lang="ja-JP" sz="1550" dirty="0">
+              <a:latin typeface="Meiryo UI" panose="020B0604030504040204" pitchFamily="50" charset="-128"/>
+              <a:ea typeface="Meiryo UI" panose="020B0604030504040204" pitchFamily="50" charset="-128"/>
+            </a:endParaRPr>
+          </a:p>
+        </p:txBody>
+      </p:sp>
+      <p:sp>
+        <p:nvSpPr>
+          <p:cNvPr id="20" name="Text 17"/>
+          <p:cNvSpPr/>
+          <p:nvPr/>
+        </p:nvSpPr>
+        <p:spPr>
+          <a:xfrm>
+            <a:off x="661475" y="5801519"/>
+            <a:ext cx="6296860" cy="217686"/>
           </a:xfrm>
           <a:prstGeom prst="rect">
             <a:avLst/>
@@ -6398,22 +5941,25 @@
           <a:p>
             <a:pPr marL="0" indent="0" algn="l">
               <a:lnSpc>
-                <a:spcPct val="133000"/>
-              </a:lnSpc>
-              <a:buNone/>
-            </a:pPr>
-            <a:r>
-              <a:rPr lang="ja-JP" altLang="en-US" sz="1450" dirty="0">
-                <a:solidFill>
-                  <a:srgbClr val="383838"/>
-                </a:solidFill>
-                <a:latin typeface="DM Sans" pitchFamily="34" charset="0"/>
-                <a:ea typeface="DM Sans" pitchFamily="34" charset="-122"/>
+                <a:spcPct val="120000"/>
+              </a:lnSpc>
+              <a:buNone/>
+            </a:pPr>
+            <a:r>
+              <a:rPr lang="ja-JP" altLang="en-US" sz="1150" dirty="0">
+                <a:solidFill>
+                  <a:srgbClr val="383838"/>
+                </a:solidFill>
+                <a:latin typeface="Meiryo UI" panose="020B0604030504040204" pitchFamily="50" charset="-128"/>
+                <a:ea typeface="Meiryo UI" panose="020B0604030504040204" pitchFamily="50" charset="-128"/>
                 <a:cs typeface="DM Sans" pitchFamily="34" charset="-120"/>
               </a:rPr>
-              <a:t>スコアシートの自動読み取りで入力を効率化</a:t>
-            </a:r>
-            <a:endParaRPr lang="ja-JP" sz="1450" dirty="0"/>
+              <a:t>アプリストア公開・ボウリング場展開</a:t>
+            </a:r>
+            <a:endParaRPr lang="ja-JP" sz="1150" dirty="0">
+              <a:latin typeface="Meiryo UI" panose="020B0604030504040204" pitchFamily="50" charset="-128"/>
+              <a:ea typeface="Meiryo UI" panose="020B0604030504040204" pitchFamily="50" charset="-128"/>
+            </a:endParaRPr>
           </a:p>
         </p:txBody>
       </p:sp>
